--- a/course/slides/integrated-offline/통합반_오프라인_01회차.pptx
+++ b/course/slides/integrated-offline/통합반_오프라인_01회차.pptx
@@ -2501,7 +2501,7 @@
           <a:lstStyle/>
           <a:p>
             <a:r>
-              <a:t>지금까지 모자랐던 것을 세 낱말로 나누어 보겠습니다. 수치 그대로가 데이터, 의미가 붙은 것이 정보, 다른 대상과 이어져 판단에 쓸 수 있는 것이 지식입니다. 병원으로 치면 검사 수치, 정상 범위를 벗어났다는 표시, 의사의 진단에 해당합니다. 수치와 진단이 별개의 일이라는 점이 닮았고, 설비에서는 조치를 정할 때 생산 일정까지 함께 따진다는 점은 다릅니다.</a:t>
+              <a:t>지금까지 모자랐던 것을 세 낱말로 나누어 보겠습니다. 수치 그대로가 데이터, 의미가 붙은 것이 정보, 다른 대상과 이어져 판단에 쓸 수 있는 것이 지식입니다.</a:t>
             </a:r>
           </a:p>
         </p:txBody>
@@ -6365,7 +6365,7 @@
       </p:sp>
       <p:pic>
         <p:nvPicPr>
-          <p:cNvPr id="6" name="삽화:흩어진정보.svg" descr="illust_4586282239143760_1791712364.png"/>
+          <p:cNvPr id="6" name="삽화:흩어진정보.svg" descr="illust_1522617459155945297_1791712364.png"/>
           <p:cNvPicPr>
             <a:picLocks noChangeAspect="1"/>
           </p:cNvPicPr>
@@ -11179,7 +11179,7 @@
       </p:sp>
       <p:pic>
         <p:nvPicPr>
-          <p:cNvPr id="6" name="삽화:노드관계.svg" descr="illust_7213179085748974910_1791712364.png"/>
+          <p:cNvPr id="6" name="삽화:노드관계.svg" descr="illust_5079010521509363843_1791712364.png"/>
           <p:cNvPicPr>
             <a:picLocks noChangeAspect="1"/>
           </p:cNvPicPr>
@@ -11775,7 +11775,7 @@
       </p:sp>
       <p:pic>
         <p:nvPicPr>
-          <p:cNvPr id="6" name="삽화:관계.svg" descr="illust_5869298148102865872_1791712364.png"/>
+          <p:cNvPr id="6" name="삽화:관계.svg" descr="illust_1155383105524419537_1791712364.png"/>
           <p:cNvPicPr>
             <a:picLocks noChangeAspect="1"/>
           </p:cNvPicPr>
@@ -15471,7 +15471,7 @@
       </p:sp>
       <p:pic>
         <p:nvPicPr>
-          <p:cNvPr id="6" name="삽화:유형과대상_0.svg" descr="illust_2477536602411205407_1791717240.png"/>
+          <p:cNvPr id="6" name="삽화:유형과대상_0.svg" descr="illust_8297328829168039496_1791717240.png"/>
           <p:cNvPicPr>
             <a:picLocks noChangeAspect="1"/>
           </p:cNvPicPr>
@@ -16927,7 +16927,7 @@
       </p:sp>
       <p:pic>
         <p:nvPicPr>
-          <p:cNvPr id="6" name="삽화:설비클래스_0.svg" descr="illust_7535935464537873851_1791717240.png"/>
+          <p:cNvPr id="6" name="삽화:설비클래스_0.svg" descr="illust_8924408724025679761_1791717240.png"/>
           <p:cNvPicPr>
             <a:picLocks noChangeAspect="1"/>
           </p:cNvPicPr>
@@ -19260,7 +19260,7 @@
       </p:sp>
       <p:pic>
         <p:nvPicPr>
-          <p:cNvPr id="6" name="삽화:속성_3.svg" descr="illust_7473619268688602587_1791717240.png"/>
+          <p:cNvPr id="6" name="삽화:속성_3.svg" descr="illust_1867349444997323189_1791717240.png"/>
           <p:cNvPicPr>
             <a:picLocks noChangeAspect="1"/>
           </p:cNvPicPr>
@@ -31003,7 +31003,7 @@
                 <a:ea typeface="맑은 고딕"/>
                 <a:cs typeface="맑은 고딕"/>
               </a:rPr>
-              <a:t>경보 이후의 판단에 필요한 지식과 그것을 대상과 관계로 적는 방법</a:t>
+              <a:t>경보는 바로 울렸는데 승인까지 왜 108초가 걸렸는가</a:t>
             </a:r>
           </a:p>
         </p:txBody>
@@ -33782,7 +33782,7 @@
       </p:sp>
       <p:pic>
         <p:nvPicPr>
-          <p:cNvPr id="6" name="삽화:원인후보.svg" descr="illust_3565215839905215536_1791712364.png"/>
+          <p:cNvPr id="6" name="삽화:원인후보.svg" descr="illust_2800988813276404180_1791712364.png"/>
           <p:cNvPicPr>
             <a:picLocks noChangeAspect="1"/>
           </p:cNvPicPr>

--- a/course/slides/integrated-offline/통합반_오프라인_01회차.pptx
+++ b/course/slides/integrated-offline/통합반_오프라인_01회차.pptx
@@ -6365,7 +6365,7 @@
       </p:sp>
       <p:pic>
         <p:nvPicPr>
-          <p:cNvPr id="6" name="삽화:흩어진정보.svg" descr="illust_1522617459155945297_1791712364.png"/>
+          <p:cNvPr id="6" name="삽화:흩어진정보.svg" descr="illust_5627826265417131464_1791712364.png"/>
           <p:cNvPicPr>
             <a:picLocks noChangeAspect="1"/>
           </p:cNvPicPr>
@@ -11179,7 +11179,7 @@
       </p:sp>
       <p:pic>
         <p:nvPicPr>
-          <p:cNvPr id="6" name="삽화:노드관계.svg" descr="illust_5079010521509363843_1791712364.png"/>
+          <p:cNvPr id="6" name="삽화:노드관계.svg" descr="illust_3572627422136163956_1791712364.png"/>
           <p:cNvPicPr>
             <a:picLocks noChangeAspect="1"/>
           </p:cNvPicPr>
@@ -11775,7 +11775,7 @@
       </p:sp>
       <p:pic>
         <p:nvPicPr>
-          <p:cNvPr id="6" name="삽화:관계.svg" descr="illust_1155383105524419537_1791712364.png"/>
+          <p:cNvPr id="6" name="삽화:관계.svg" descr="illust_8160441194584338554_1791712364.png"/>
           <p:cNvPicPr>
             <a:picLocks noChangeAspect="1"/>
           </p:cNvPicPr>
@@ -15471,7 +15471,7 @@
       </p:sp>
       <p:pic>
         <p:nvPicPr>
-          <p:cNvPr id="6" name="삽화:유형과대상_0.svg" descr="illust_8297328829168039496_1791717240.png"/>
+          <p:cNvPr id="6" name="삽화:유형과대상_0.svg" descr="illust_4627653888697026191_1791717240.png"/>
           <p:cNvPicPr>
             <a:picLocks noChangeAspect="1"/>
           </p:cNvPicPr>
@@ -16927,7 +16927,7 @@
       </p:sp>
       <p:pic>
         <p:nvPicPr>
-          <p:cNvPr id="6" name="삽화:설비클래스_0.svg" descr="illust_8924408724025679761_1791717240.png"/>
+          <p:cNvPr id="6" name="삽화:설비클래스_0.svg" descr="illust_1121089110786154524_1791717240.png"/>
           <p:cNvPicPr>
             <a:picLocks noChangeAspect="1"/>
           </p:cNvPicPr>
@@ -19260,7 +19260,7 @@
       </p:sp>
       <p:pic>
         <p:nvPicPr>
-          <p:cNvPr id="6" name="삽화:속성_3.svg" descr="illust_1867349444997323189_1791717240.png"/>
+          <p:cNvPr id="6" name="삽화:속성_3.svg" descr="illust_9087389448674819180_1791717240.png"/>
           <p:cNvPicPr>
             <a:picLocks noChangeAspect="1"/>
           </p:cNvPicPr>
@@ -31003,7 +31003,7 @@
                 <a:ea typeface="맑은 고딕"/>
                 <a:cs typeface="맑은 고딕"/>
               </a:rPr>
-              <a:t>경보는 바로 울렸는데 승인까지 왜 108초가 걸렸는가</a:t>
+              <a:t>경보 이후의 판단에 필요한 지식과 그것을 대상과 관계로 적는 방법</a:t>
             </a:r>
           </a:p>
         </p:txBody>
@@ -33782,7 +33782,7 @@
       </p:sp>
       <p:pic>
         <p:nvPicPr>
-          <p:cNvPr id="6" name="삽화:원인후보.svg" descr="illust_2800988813276404180_1791712364.png"/>
+          <p:cNvPr id="6" name="삽화:원인후보.svg" descr="illust_4960113583539635775_1791712364.png"/>
           <p:cNvPicPr>
             <a:picLocks noChangeAspect="1"/>
           </p:cNvPicPr>

--- a/course/slides/integrated-offline/통합반_오프라인_01회차.pptx
+++ b/course/slides/integrated-offline/통합반_오프라인_01회차.pptx
@@ -2571,7 +2571,7 @@
           <a:lstStyle/>
           <a:p>
             <a:r>
-              <a:t>판단에 쓰인 정보가 어디에 있었는지를 보겠습니다. 센서 값은 값을 시간 순서로 쌓는 저장소, 곧 시계열 DB인 TimescaleDB에, 운전 상태는 설비를 제어하는 PLC의 상태 메시지에, 원인 후보와 조치 방법은 설비 매뉴얼에, 생산 일정은 MES에 있습니다. 센서 값과 운전 상태는 매초 바뀌는 값이고, 생산 계획과 실적을 관리하는 MES에는 긴급 오더의 납기가 약 6시간 남았다고 기록되어 있었습니다. 그림의 점선은 이들이 이어져 있지 않다는 뜻입니다.</a:t>
+              <a:t>판단에 쓰인 정보가 어디에 있었는지를 보겠습니다. 센서 값은 값을 시간 순서로 쌓는 저장소, 곧 시계열 DB에, 운전 상태는 설비를 제어하는 PLC의 상태 메시지에, 원인 후보와 조치 방법은 설비 매뉴얼에, 생산 일정은 MES에 있습니다. 센서 값과 운전 상태는 매초 바뀌는 값이고, 생산 계획과 실적을 관리하는 MES에는 긴급 오더의 납기가 약 6시간 남았다고 기록되어 있었습니다. 그림의 점선은 이들이 이어져 있지 않다는 뜻입니다.</a:t>
             </a:r>
           </a:p>
         </p:txBody>
@@ -6365,7 +6365,7 @@
       </p:sp>
       <p:pic>
         <p:nvPicPr>
-          <p:cNvPr id="6" name="삽화:흩어진정보.svg" descr="illust_5627826265417131464_1791712364.png"/>
+          <p:cNvPr id="6" name="삽화:흩어진정보.svg" descr="illust_2814950495368959510_1791712364.png"/>
           <p:cNvPicPr>
             <a:picLocks noChangeAspect="1"/>
           </p:cNvPicPr>
@@ -6424,7 +6424,7 @@
                 <a:ea typeface="맑은 고딕"/>
                 <a:cs typeface="맑은 고딕"/>
               </a:rPr>
-              <a:t>TimescaleDB</a:t>
+              <a:t>시계열 저장소</a:t>
             </a:r>
           </a:p>
           <a:p>
@@ -10646,7 +10646,7 @@
                 <a:ea typeface="맑은 고딕"/>
                 <a:cs typeface="맑은 고딕"/>
               </a:rPr>
-              <a:t>• HYD는 Neo4j를 쓰고, 질의 언어 Cypher로 조회한다</a:t>
+              <a:t>• 이 역할에는 Neo4j 같은 것이 있고, 질의 언어 Cypher로 조회한다</a:t>
             </a:r>
           </a:p>
         </p:txBody>
@@ -10886,7 +10886,7 @@
                 <a:ea typeface="맑은 고딕"/>
                 <a:cs typeface="맑은 고딕"/>
               </a:rPr>
-              <a:t>• 이 정의에 맞춰 실제 대상을 채워 Neo4j에 저장한 것이 HYD의 지식 그래프이다</a:t>
+              <a:t>• 이 정의에 맞춰 실제 대상을 채워 그래프 DB에 저장한 것이 HYD의 지식 그래프이다</a:t>
             </a:r>
           </a:p>
         </p:txBody>
@@ -11179,7 +11179,7 @@
       </p:sp>
       <p:pic>
         <p:nvPicPr>
-          <p:cNvPr id="6" name="삽화:노드관계.svg" descr="illust_3572627422136163956_1791712364.png"/>
+          <p:cNvPr id="6" name="삽화:노드관계.svg" descr="illust_704027602687746253_1791712364.png"/>
           <p:cNvPicPr>
             <a:picLocks noChangeAspect="1"/>
           </p:cNvPicPr>
@@ -11775,7 +11775,7 @@
       </p:sp>
       <p:pic>
         <p:nvPicPr>
-          <p:cNvPr id="6" name="삽화:관계.svg" descr="illust_8160441194584338554_1791712364.png"/>
+          <p:cNvPr id="6" name="삽화:관계.svg" descr="illust_1542986426066555257_1791712364.png"/>
           <p:cNvPicPr>
             <a:picLocks noChangeAspect="1"/>
           </p:cNvPicPr>
@@ -15471,7 +15471,7 @@
       </p:sp>
       <p:pic>
         <p:nvPicPr>
-          <p:cNvPr id="6" name="삽화:유형과대상_0.svg" descr="illust_4627653888697026191_1791717240.png"/>
+          <p:cNvPr id="6" name="삽화:유형과대상_0.svg" descr="illust_2867430417216326224_1791717240.png"/>
           <p:cNvPicPr>
             <a:picLocks noChangeAspect="1"/>
           </p:cNvPicPr>
@@ -16927,7 +16927,7 @@
       </p:sp>
       <p:pic>
         <p:nvPicPr>
-          <p:cNvPr id="6" name="삽화:설비클래스_0.svg" descr="illust_1121089110786154524_1791717240.png"/>
+          <p:cNvPr id="6" name="삽화:설비클래스_0.svg" descr="illust_713796824596120704_1791717240.png"/>
           <p:cNvPicPr>
             <a:picLocks noChangeAspect="1"/>
           </p:cNvPicPr>
@@ -19260,7 +19260,7 @@
       </p:sp>
       <p:pic>
         <p:nvPicPr>
-          <p:cNvPr id="6" name="삽화:속성_3.svg" descr="illust_9087389448674819180_1791717240.png"/>
+          <p:cNvPr id="6" name="삽화:속성_3.svg" descr="illust_2648817405317862939_1791717240.png"/>
           <p:cNvPicPr>
             <a:picLocks noChangeAspect="1"/>
           </p:cNvPicPr>
@@ -33782,7 +33782,7 @@
       </p:sp>
       <p:pic>
         <p:nvPicPr>
-          <p:cNvPr id="6" name="삽화:원인후보.svg" descr="illust_4960113583539635775_1791712364.png"/>
+          <p:cNvPr id="6" name="삽화:원인후보.svg" descr="illust_7756461402864963915_1791712364.png"/>
           <p:cNvPicPr>
             <a:picLocks noChangeAspect="1"/>
           </p:cNvPicPr>

--- a/course/slides/integrated-offline/통합반_오프라인_01회차.pptx
+++ b/course/slides/integrated-offline/통합반_오프라인_01회차.pptx
@@ -1031,7 +1031,7 @@
           <a:lstStyle/>
           <a:p>
             <a:r>
-              <a:t>처음의 정의로 돌아가겠습니다. 지금까지 그림에서 본 노드의 종류와 화살표가 네 가지 가운데 종류와 관계입니다. 여기에 속성과 제약이 더해집니다.</a:t>
+              <a:t>지금까지 그림에서 본 노드의 종류와 화살표가 온톨로지가 정의하는 네 가지 가운데 종류와 관계입니다. 여기에 속성과 제약이 더해집니다. 먼저 종류와 속성입니다. HYD의 온톨로지는 설비 쪽, 진단 쪽, 조치 쪽으로 종류를 두고, 유온이라는 대상에는 단위와 정상값과 한계가 속성으로 적혀 있습니다. 관계는 이름이 다르면 뜻이 달라서, 같은 고장 유형에서 조치로 가는 선이라도 MITIGATED_BY는 우선 완화하고 REMEDIED_BY는 근본적으로 없앱니다. 제약은 CAUSES를 원인에서 고장 유형으로만 잇게 하므로 증상에서 조치로 그은 연결은 어긋나며, 관계 그림과 온톨로지를 가르는 것이 이 제약입니다.</a:t>
             </a:r>
           </a:p>
         </p:txBody>
@@ -2501,7 +2501,7 @@
           <a:lstStyle/>
           <a:p>
             <a:r>
-              <a:t>지금까지 모자랐던 것을 세 낱말로 나누어 보겠습니다. 수치 그대로가 데이터, 의미가 붙은 것이 정보, 다른 대상과 이어져 판단에 쓸 수 있는 것이 지식입니다.</a:t>
+              <a:t>모자랐던 것을 세 낱말로 나누어, 같은 사건의 문장 다섯 개로 보겠습니다. 오른쪽 열은 앞에서 판단을 나눌 때 쓴 네 질문입니다. 46.2만으로는 무엇을 잰 값인지, 단위가 무엇인지, 높은 것인지 알 수 없습니다. 대상과 단위가 붙으면 지금 얼마인가에, 기준이 붙으면 벗어났는가에 답할 수 있으며, 태그 이름과 경보 조건이 이 일을 해 줍니다. 아래 두 줄은 지식입니다. 냉각 효율이 낮고 팬 진동이 정상이면 핀 오염이고 핀 오염이면 세척한다는 것처럼, 원인과 조치로 이어진 지식만이 왜와 무엇을에 답합니다.</a:t>
             </a:r>
           </a:p>
         </p:txBody>
@@ -6365,7 +6365,7 @@
       </p:sp>
       <p:pic>
         <p:nvPicPr>
-          <p:cNvPr id="6" name="삽화:흩어진정보.svg" descr="illust_2814950495368959510_1791712364.png"/>
+          <p:cNvPr id="6" name="삽화:흩어진정보.svg" descr="illust_2020846333738739939_1791712364.png"/>
           <p:cNvPicPr>
             <a:picLocks noChangeAspect="1"/>
           </p:cNvPicPr>
@@ -11179,7 +11179,7 @@
       </p:sp>
       <p:pic>
         <p:nvPicPr>
-          <p:cNvPr id="6" name="삽화:노드관계.svg" descr="illust_704027602687746253_1791712364.png"/>
+          <p:cNvPr id="6" name="삽화:노드관계.svg" descr="illust_2084797606366218484_1791712364.png"/>
           <p:cNvPicPr>
             <a:picLocks noChangeAspect="1"/>
           </p:cNvPicPr>
@@ -11775,7 +11775,7 @@
       </p:sp>
       <p:pic>
         <p:nvPicPr>
-          <p:cNvPr id="6" name="삽화:관계.svg" descr="illust_1542986426066555257_1791712364.png"/>
+          <p:cNvPr id="6" name="삽화:관계.svg" descr="illust_7619302018465961696_1791712364.png"/>
           <p:cNvPicPr>
             <a:picLocks noChangeAspect="1"/>
           </p:cNvPicPr>
@@ -13195,7 +13195,7 @@
                 <a:ea typeface="맑은 고딕"/>
                 <a:cs typeface="맑은 고딕"/>
               </a:rPr>
-              <a:t>지금까지 본 노드와 관계는 온톨로지의 종류와 관계에 해당하며, 여기에 속성과 제약이 더해져 정의가 완성된다.</a:t>
+              <a:t>네 가지 정의가 함께 있을 때 값의 뜻이 정해지고, 관계의 뜻이 이름으로 갈리며, 정의에 어긋난 연결이 걸러진다.</a:t>
             </a:r>
           </a:p>
         </p:txBody>
@@ -13276,44 +13276,13 @@
         </p:nvSpPr>
         <p:spPr>
           <a:xfrm>
-            <a:off x="548640" y="2418588"/>
-            <a:ext cx="2567863" cy="3145535"/>
+            <a:off x="548640" y="1655064"/>
+            <a:ext cx="11094415" cy="1126998"/>
           </a:xfrm>
           <a:prstGeom prst="roundRect">
             <a:avLst>
-              <a:gd name="adj" fmla="val 4000"/>
+              <a:gd name="adj" fmla="val 6000"/>
             </a:avLst>
-          </a:prstGeom>
-          <a:solidFill>
-            <a:srgbClr val="FFFFFF"/>
-          </a:solidFill>
-          <a:ln w="15875">
-            <a:solidFill>
-              <a:srgbClr val="D3D9E1"/>
-            </a:solidFill>
-          </a:ln>
-        </p:spPr>
-        <p:txBody>
-          <a:bodyPr rtlCol="0" anchor="ctr"/>
-          <a:lstStyle/>
-          <a:p>
-            <a:pPr algn="ctr"/>
-          </a:p>
-        </p:txBody>
-      </p:sp>
-      <p:sp>
-        <p:nvSpPr>
-          <p:cNvPr id="7" name="Oval 6"/>
-          <p:cNvSpPr/>
-          <p:nvPr/>
-        </p:nvSpPr>
-        <p:spPr>
-          <a:xfrm>
-            <a:off x="777240" y="2619756"/>
-            <a:ext cx="731520" cy="731520"/>
-          </a:xfrm>
-          <a:prstGeom prst="ellipse">
-            <a:avLst/>
           </a:prstGeom>
           <a:solidFill>
             <a:srgbClr val="E7F3FD"/>
@@ -13330,48 +13299,24 @@
           </a:p>
         </p:txBody>
       </p:sp>
-      <p:pic>
-        <p:nvPicPr>
-          <p:cNvPr id="8" name="아이콘:category" descr="category_13294B_1.6.png"/>
-          <p:cNvPicPr>
-            <a:picLocks noChangeAspect="1"/>
-          </p:cNvPicPr>
-          <p:nvPr/>
-        </p:nvPicPr>
-        <p:blipFill>
-          <a:blip r:embed="rId3"/>
-          <a:stretch>
-            <a:fillRect/>
-          </a:stretch>
-        </p:blipFill>
-        <p:spPr>
-          <a:xfrm>
-            <a:off x="930859" y="2773375"/>
-            <a:ext cx="424281" cy="424281"/>
-          </a:xfrm>
-          <a:prstGeom prst="rect">
-            <a:avLst/>
-          </a:prstGeom>
-        </p:spPr>
-      </p:pic>
-      <p:sp>
-        <p:nvSpPr>
-          <p:cNvPr id="9" name="TextBox 8"/>
-          <p:cNvSpPr txBox="1"/>
-          <p:nvPr/>
-        </p:nvSpPr>
-        <p:spPr>
-          <a:xfrm>
-            <a:off x="713232" y="3442716"/>
-            <a:ext cx="2238679" cy="1618487"/>
-          </a:xfrm>
-          <a:prstGeom prst="rect">
-            <a:avLst/>
-          </a:prstGeom>
-          <a:noFill/>
-        </p:spPr>
-        <p:txBody>
-          <a:bodyPr wrap="square" anchor="t"/>
+      <p:sp>
+        <p:nvSpPr>
+          <p:cNvPr id="7" name="TextBox 6"/>
+          <p:cNvSpPr txBox="1"/>
+          <p:nvPr/>
+        </p:nvSpPr>
+        <p:spPr>
+          <a:xfrm>
+            <a:off x="640080" y="1627632"/>
+            <a:ext cx="3291839" cy="1181862"/>
+          </a:xfrm>
+          <a:prstGeom prst="rect">
+            <a:avLst/>
+          </a:prstGeom>
+          <a:noFill/>
+        </p:spPr>
+        <p:txBody>
+          <a:bodyPr wrap="square" anchor="ctr"/>
           <a:lstStyle/>
           <a:p>
             <a:pPr algn="l">
@@ -13379,7 +13324,7 @@
                 <a:spcPct val="110000"/>
               </a:lnSpc>
               <a:spcAft>
-                <a:spcPts val="400"/>
+                <a:spcPts val="200"/>
               </a:spcAft>
             </a:pPr>
             <a:r>
@@ -13400,11 +13345,53 @@
                 <a:spcPct val="110000"/>
               </a:lnSpc>
               <a:spcAft>
-                <a:spcPts val="400"/>
+                <a:spcPts val="200"/>
               </a:spcAft>
             </a:pPr>
             <a:r>
-              <a:rPr sz="1350" b="0">
+              <a:rPr sz="1150" b="0">
+                <a:solidFill>
+                  <a:srgbClr val="556175"/>
+                </a:solidFill>
+                <a:latin typeface="맑은 고딕"/>
+                <a:ea typeface="맑은 고딕"/>
+                <a:cs typeface="맑은 고딕"/>
+              </a:rPr>
+              <a:t>대상의 갈래</a:t>
+            </a:r>
+          </a:p>
+        </p:txBody>
+      </p:sp>
+      <p:sp>
+        <p:nvSpPr>
+          <p:cNvPr id="8" name="TextBox 7"/>
+          <p:cNvSpPr txBox="1"/>
+          <p:nvPr/>
+        </p:nvSpPr>
+        <p:spPr>
+          <a:xfrm>
+            <a:off x="4023359" y="1627632"/>
+            <a:ext cx="7528255" cy="1181862"/>
+          </a:xfrm>
+          <a:prstGeom prst="rect">
+            <a:avLst/>
+          </a:prstGeom>
+          <a:noFill/>
+        </p:spPr>
+        <p:txBody>
+          <a:bodyPr wrap="square" anchor="ctr"/>
+          <a:lstStyle/>
+          <a:p>
+            <a:pPr algn="l">
+              <a:lnSpc>
+                <a:spcPct val="110000"/>
+              </a:lnSpc>
+              <a:spcAft>
+                <a:spcPts val="300"/>
+              </a:spcAft>
+            </a:pPr>
+            <a:r>
+              <a:rPr sz="1400" b="0">
                 <a:solidFill>
                   <a:srgbClr val="1F2A3A"/>
                 </a:solidFill>
@@ -13412,7 +13399,7 @@
                 <a:ea typeface="맑은 고딕"/>
                 <a:cs typeface="맑은 고딕"/>
               </a:rPr>
-              <a:t>• 어떤 대상이 있는가를 정한다</a:t>
+              <a:t>온톨로지가 다루는 대상의 갈래이다.</a:t>
             </a:r>
           </a:p>
           <a:p>
@@ -13421,11 +13408,11 @@
                 <a:spcPct val="110000"/>
               </a:lnSpc>
               <a:spcAft>
-                <a:spcPts val="400"/>
+                <a:spcPts val="300"/>
               </a:spcAft>
             </a:pPr>
             <a:r>
-              <a:rPr sz="1350" b="0">
+              <a:rPr sz="1400" b="0">
                 <a:solidFill>
                   <a:srgbClr val="1F2A3A"/>
                 </a:solidFill>
@@ -13433,26 +13420,66 @@
                 <a:ea typeface="맑은 고딕"/>
                 <a:cs typeface="맑은 고딕"/>
               </a:rPr>
-              <a:t>• 설비, 센서, 증상, 고장 유형, 원인, 조치</a:t>
-            </a:r>
-          </a:p>
-        </p:txBody>
-      </p:sp>
-      <p:sp>
-        <p:nvSpPr>
-          <p:cNvPr id="10" name="Rounded Rectangle 9"/>
+              <a:t>설비 쪽: 설비, 구성 요소, 센서 (예: HYD-01, 오일 쿨러, TS1)</a:t>
+            </a:r>
+          </a:p>
+          <a:p>
+            <a:pPr algn="l">
+              <a:lnSpc>
+                <a:spcPct val="110000"/>
+              </a:lnSpc>
+              <a:spcAft>
+                <a:spcPts val="300"/>
+              </a:spcAft>
+            </a:pPr>
+            <a:r>
+              <a:rPr sz="1400" b="0">
+                <a:solidFill>
+                  <a:srgbClr val="1F2A3A"/>
+                </a:solidFill>
+                <a:latin typeface="맑은 고딕"/>
+                <a:ea typeface="맑은 고딕"/>
+                <a:cs typeface="맑은 고딕"/>
+              </a:rPr>
+              <a:t>진단 쪽: 이상 패턴, 증상, 고장 유형, 원인, 증거 (예: 쿨러 핀 오염은 원인)</a:t>
+            </a:r>
+          </a:p>
+          <a:p>
+            <a:pPr algn="l">
+              <a:lnSpc>
+                <a:spcPct val="110000"/>
+              </a:lnSpc>
+              <a:spcAft>
+                <a:spcPts val="300"/>
+              </a:spcAft>
+            </a:pPr>
+            <a:r>
+              <a:rPr sz="1400" b="0">
+                <a:solidFill>
+                  <a:srgbClr val="1F2A3A"/>
+                </a:solidFill>
+                <a:latin typeface="맑은 고딕"/>
+                <a:ea typeface="맑은 고딕"/>
+                <a:cs typeface="맑은 고딕"/>
+              </a:rPr>
+              <a:t>조치 쪽: 조치 방법, 근거 문서 (예: 팬 최대 운전, HM-8.5)</a:t>
+            </a:r>
+          </a:p>
+        </p:txBody>
+      </p:sp>
+      <p:sp>
+        <p:nvSpPr>
+          <p:cNvPr id="9" name="Rectangle 8"/>
           <p:cNvSpPr/>
           <p:nvPr/>
         </p:nvSpPr>
         <p:spPr>
           <a:xfrm>
-            <a:off x="777240" y="5134356"/>
-            <a:ext cx="1621536" cy="292608"/>
-          </a:xfrm>
-          <a:prstGeom prst="roundRect">
-            <a:avLst>
-              <a:gd name="adj" fmla="val 50000"/>
-            </a:avLst>
+            <a:off x="548640" y="2800350"/>
+            <a:ext cx="11094415" cy="13716"/>
+          </a:xfrm>
+          <a:prstGeom prst="rect">
+            <a:avLst/>
           </a:prstGeom>
           <a:solidFill>
             <a:srgbClr val="D3D9E1"/>
@@ -13471,14 +13498,77 @@
       </p:sp>
       <p:sp>
         <p:nvSpPr>
+          <p:cNvPr id="10" name="TextBox 9"/>
+          <p:cNvSpPr txBox="1"/>
+          <p:nvPr/>
+        </p:nvSpPr>
+        <p:spPr>
+          <a:xfrm>
+            <a:off x="640080" y="2809494"/>
+            <a:ext cx="3291839" cy="1181862"/>
+          </a:xfrm>
+          <a:prstGeom prst="rect">
+            <a:avLst/>
+          </a:prstGeom>
+          <a:noFill/>
+        </p:spPr>
+        <p:txBody>
+          <a:bodyPr wrap="square" anchor="ctr"/>
+          <a:lstStyle/>
+          <a:p>
+            <a:pPr algn="l">
+              <a:lnSpc>
+                <a:spcPct val="110000"/>
+              </a:lnSpc>
+              <a:spcAft>
+                <a:spcPts val="200"/>
+              </a:spcAft>
+            </a:pPr>
+            <a:r>
+              <a:rPr sz="1800" b="1">
+                <a:solidFill>
+                  <a:srgbClr val="13294B"/>
+                </a:solidFill>
+                <a:latin typeface="맑은 고딕"/>
+                <a:ea typeface="맑은 고딕"/>
+                <a:cs typeface="맑은 고딕"/>
+              </a:rPr>
+              <a:t>속성</a:t>
+            </a:r>
+          </a:p>
+          <a:p>
+            <a:pPr algn="l">
+              <a:lnSpc>
+                <a:spcPct val="110000"/>
+              </a:lnSpc>
+              <a:spcAft>
+                <a:spcPts val="200"/>
+              </a:spcAft>
+            </a:pPr>
+            <a:r>
+              <a:rPr sz="1150" b="0">
+                <a:solidFill>
+                  <a:srgbClr val="556175"/>
+                </a:solidFill>
+                <a:latin typeface="맑은 고딕"/>
+                <a:ea typeface="맑은 고딕"/>
+                <a:cs typeface="맑은 고딕"/>
+              </a:rPr>
+              <a:t>℃ · 48 · 65</a:t>
+            </a:r>
+          </a:p>
+        </p:txBody>
+      </p:sp>
+      <p:sp>
+        <p:nvSpPr>
           <p:cNvPr id="11" name="TextBox 10"/>
           <p:cNvSpPr txBox="1"/>
           <p:nvPr/>
         </p:nvSpPr>
         <p:spPr>
           <a:xfrm>
-            <a:off x="777240" y="5134356"/>
-            <a:ext cx="1621536" cy="292608"/>
+            <a:off x="4023359" y="2809494"/>
+            <a:ext cx="7528255" cy="1181862"/>
           </a:xfrm>
           <a:prstGeom prst="rect">
             <a:avLst/>
@@ -13489,210 +13579,62 @@
           <a:bodyPr wrap="square" anchor="ctr"/>
           <a:lstStyle/>
           <a:p>
-            <a:pPr algn="ctr">
-              <a:lnSpc>
-                <a:spcPct val="110000"/>
-              </a:lnSpc>
-            </a:pPr>
-            <a:r>
-              <a:rPr sz="1200" b="1">
-                <a:solidFill>
-                  <a:srgbClr val="13294B"/>
-                </a:solidFill>
-                <a:latin typeface="맑은 고딕"/>
-                <a:ea typeface="맑은 고딕"/>
-                <a:cs typeface="맑은 고딕"/>
-              </a:rPr>
-              <a:t>예: 핀 오염 = 원인</a:t>
-            </a:r>
-          </a:p>
-        </p:txBody>
-      </p:sp>
-      <p:sp>
-        <p:nvSpPr>
-          <p:cNvPr id="12" name="Rounded Rectangle 11"/>
+            <a:pPr algn="l">
+              <a:lnSpc>
+                <a:spcPct val="110000"/>
+              </a:lnSpc>
+              <a:spcAft>
+                <a:spcPts val="300"/>
+              </a:spcAft>
+            </a:pPr>
+            <a:r>
+              <a:rPr sz="1400" b="0">
+                <a:solidFill>
+                  <a:srgbClr val="1F2A3A"/>
+                </a:solidFill>
+                <a:latin typeface="맑은 고딕"/>
+                <a:ea typeface="맑은 고딕"/>
+                <a:cs typeface="맑은 고딕"/>
+              </a:rPr>
+              <a:t>대상마다 채워 두는 값의 칸이며, 같은 종류의 대상은 같은 칸을 갖는다.</a:t>
+            </a:r>
+          </a:p>
+          <a:p>
+            <a:pPr algn="l">
+              <a:lnSpc>
+                <a:spcPct val="110000"/>
+              </a:lnSpc>
+              <a:spcAft>
+                <a:spcPts val="300"/>
+              </a:spcAft>
+            </a:pPr>
+            <a:r>
+              <a:rPr sz="1400" b="0">
+                <a:solidFill>
+                  <a:srgbClr val="1F2A3A"/>
+                </a:solidFill>
+                <a:latin typeface="맑은 고딕"/>
+                <a:ea typeface="맑은 고딕"/>
+                <a:cs typeface="맑은 고딕"/>
+              </a:rPr>
+              <a:t>유온: 단위 ℃, 정상값 48 ℃, 한계 65 ℃(인터록의 기준과 같다)</a:t>
+            </a:r>
+          </a:p>
+        </p:txBody>
+      </p:sp>
+      <p:sp>
+        <p:nvSpPr>
+          <p:cNvPr id="12" name="Rectangle 11"/>
           <p:cNvSpPr/>
           <p:nvPr/>
         </p:nvSpPr>
         <p:spPr>
           <a:xfrm>
-            <a:off x="3390823" y="2418588"/>
-            <a:ext cx="2567863" cy="3145535"/>
-          </a:xfrm>
-          <a:prstGeom prst="roundRect">
-            <a:avLst>
-              <a:gd name="adj" fmla="val 4000"/>
-            </a:avLst>
-          </a:prstGeom>
-          <a:solidFill>
-            <a:srgbClr val="FFFFFF"/>
-          </a:solidFill>
-          <a:ln w="15875">
-            <a:solidFill>
-              <a:srgbClr val="D3D9E1"/>
-            </a:solidFill>
-          </a:ln>
-        </p:spPr>
-        <p:txBody>
-          <a:bodyPr rtlCol="0" anchor="ctr"/>
-          <a:lstStyle/>
-          <a:p>
-            <a:pPr algn="ctr"/>
-          </a:p>
-        </p:txBody>
-      </p:sp>
-      <p:sp>
-        <p:nvSpPr>
-          <p:cNvPr id="13" name="Oval 12"/>
-          <p:cNvSpPr/>
-          <p:nvPr/>
-        </p:nvSpPr>
-        <p:spPr>
-          <a:xfrm>
-            <a:off x="3619423" y="2619756"/>
-            <a:ext cx="731520" cy="731520"/>
-          </a:xfrm>
-          <a:prstGeom prst="ellipse">
-            <a:avLst/>
-          </a:prstGeom>
-          <a:solidFill>
-            <a:srgbClr val="E7F3FD"/>
-          </a:solidFill>
-          <a:ln>
-            <a:noFill/>
-          </a:ln>
-        </p:spPr>
-        <p:txBody>
-          <a:bodyPr rtlCol="0" anchor="ctr"/>
-          <a:lstStyle/>
-          <a:p>
-            <a:pPr algn="ctr"/>
-          </a:p>
-        </p:txBody>
-      </p:sp>
-      <p:pic>
-        <p:nvPicPr>
-          <p:cNvPr id="14" name="아이콘:adjustments-horizontal" descr="adjustments-horizontal_13294B_1.6.png"/>
-          <p:cNvPicPr>
-            <a:picLocks noChangeAspect="1"/>
-          </p:cNvPicPr>
-          <p:nvPr/>
-        </p:nvPicPr>
-        <p:blipFill>
-          <a:blip r:embed="rId4"/>
-          <a:stretch>
-            <a:fillRect/>
-          </a:stretch>
-        </p:blipFill>
-        <p:spPr>
-          <a:xfrm>
-            <a:off x="3773043" y="2773375"/>
-            <a:ext cx="424281" cy="424281"/>
-          </a:xfrm>
-          <a:prstGeom prst="rect">
-            <a:avLst/>
-          </a:prstGeom>
-        </p:spPr>
-      </p:pic>
-      <p:sp>
-        <p:nvSpPr>
-          <p:cNvPr id="15" name="TextBox 14"/>
-          <p:cNvSpPr txBox="1"/>
-          <p:nvPr/>
-        </p:nvSpPr>
-        <p:spPr>
-          <a:xfrm>
-            <a:off x="3555415" y="3442716"/>
-            <a:ext cx="2238679" cy="1618487"/>
-          </a:xfrm>
-          <a:prstGeom prst="rect">
-            <a:avLst/>
-          </a:prstGeom>
-          <a:noFill/>
-        </p:spPr>
-        <p:txBody>
-          <a:bodyPr wrap="square" anchor="t"/>
-          <a:lstStyle/>
-          <a:p>
-            <a:pPr algn="l">
-              <a:lnSpc>
-                <a:spcPct val="110000"/>
-              </a:lnSpc>
-              <a:spcAft>
-                <a:spcPts val="400"/>
-              </a:spcAft>
-            </a:pPr>
-            <a:r>
-              <a:rPr sz="1800" b="1">
-                <a:solidFill>
-                  <a:srgbClr val="13294B"/>
-                </a:solidFill>
-                <a:latin typeface="맑은 고딕"/>
-                <a:ea typeface="맑은 고딕"/>
-                <a:cs typeface="맑은 고딕"/>
-              </a:rPr>
-              <a:t>속성</a:t>
-            </a:r>
-          </a:p>
-          <a:p>
-            <a:pPr algn="l">
-              <a:lnSpc>
-                <a:spcPct val="110000"/>
-              </a:lnSpc>
-              <a:spcAft>
-                <a:spcPts val="400"/>
-              </a:spcAft>
-            </a:pPr>
-            <a:r>
-              <a:rPr sz="1350" b="0">
-                <a:solidFill>
-                  <a:srgbClr val="1F2A3A"/>
-                </a:solidFill>
-                <a:latin typeface="맑은 고딕"/>
-                <a:ea typeface="맑은 고딕"/>
-                <a:cs typeface="맑은 고딕"/>
-              </a:rPr>
-              <a:t>• 대상이 갖는 값의 칸을 정한다</a:t>
-            </a:r>
-          </a:p>
-          <a:p>
-            <a:pPr algn="l">
-              <a:lnSpc>
-                <a:spcPct val="110000"/>
-              </a:lnSpc>
-              <a:spcAft>
-                <a:spcPts val="400"/>
-              </a:spcAft>
-            </a:pPr>
-            <a:r>
-              <a:rPr sz="1350" b="0">
-                <a:solidFill>
-                  <a:srgbClr val="1F2A3A"/>
-                </a:solidFill>
-                <a:latin typeface="맑은 고딕"/>
-                <a:ea typeface="맑은 고딕"/>
-                <a:cs typeface="맑은 고딕"/>
-              </a:rPr>
-              <a:t>• 유온이라는 대상의 단위, 정상값, 한계</a:t>
-            </a:r>
-          </a:p>
-        </p:txBody>
-      </p:sp>
-      <p:sp>
-        <p:nvSpPr>
-          <p:cNvPr id="16" name="Rounded Rectangle 15"/>
-          <p:cNvSpPr/>
-          <p:nvPr/>
-        </p:nvSpPr>
-        <p:spPr>
-          <a:xfrm>
-            <a:off x="3619423" y="5134356"/>
-            <a:ext cx="1588008" cy="292608"/>
-          </a:xfrm>
-          <a:prstGeom prst="roundRect">
-            <a:avLst>
-              <a:gd name="adj" fmla="val 50000"/>
-            </a:avLst>
+            <a:off x="548640" y="3982212"/>
+            <a:ext cx="11094415" cy="13716"/>
+          </a:xfrm>
+          <a:prstGeom prst="rect">
+            <a:avLst/>
           </a:prstGeom>
           <a:solidFill>
             <a:srgbClr val="D3D9E1"/>
@@ -13711,14 +13653,14 @@
       </p:sp>
       <p:sp>
         <p:nvSpPr>
-          <p:cNvPr id="17" name="TextBox 16"/>
-          <p:cNvSpPr txBox="1"/>
-          <p:nvPr/>
-        </p:nvSpPr>
-        <p:spPr>
-          <a:xfrm>
-            <a:off x="3619423" y="5134356"/>
-            <a:ext cx="1588008" cy="292608"/>
+          <p:cNvPr id="13" name="TextBox 12"/>
+          <p:cNvSpPr txBox="1"/>
+          <p:nvPr/>
+        </p:nvSpPr>
+        <p:spPr>
+          <a:xfrm>
+            <a:off x="640080" y="3991356"/>
+            <a:ext cx="3291839" cy="1181862"/>
           </a:xfrm>
           <a:prstGeom prst="rect">
             <a:avLst/>
@@ -13729,13 +13671,16 @@
           <a:bodyPr wrap="square" anchor="ctr"/>
           <a:lstStyle/>
           <a:p>
-            <a:pPr algn="ctr">
-              <a:lnSpc>
-                <a:spcPct val="110000"/>
-              </a:lnSpc>
-            </a:pPr>
-            <a:r>
-              <a:rPr sz="1200" b="1">
+            <a:pPr algn="l">
+              <a:lnSpc>
+                <a:spcPct val="110000"/>
+              </a:lnSpc>
+              <a:spcAft>
+                <a:spcPts val="200"/>
+              </a:spcAft>
+            </a:pPr>
+            <a:r>
+              <a:rPr sz="1800" b="1">
                 <a:solidFill>
                   <a:srgbClr val="13294B"/>
                 </a:solidFill>
@@ -13743,196 +13688,129 @@
                 <a:ea typeface="맑은 고딕"/>
                 <a:cs typeface="맑은 고딕"/>
               </a:rPr>
-              <a:t>예: ℃ · 48 · 65</a:t>
-            </a:r>
-          </a:p>
-        </p:txBody>
-      </p:sp>
-      <p:sp>
-        <p:nvSpPr>
-          <p:cNvPr id="18" name="Rounded Rectangle 17"/>
+              <a:t>관계</a:t>
+            </a:r>
+          </a:p>
+          <a:p>
+            <a:pPr algn="l">
+              <a:lnSpc>
+                <a:spcPct val="110000"/>
+              </a:lnSpc>
+              <a:spcAft>
+                <a:spcPts val="200"/>
+              </a:spcAft>
+            </a:pPr>
+            <a:r>
+              <a:rPr sz="1150" b="0">
+                <a:solidFill>
+                  <a:srgbClr val="556175"/>
+                </a:solidFill>
+                <a:latin typeface="맑은 고딕"/>
+                <a:ea typeface="맑은 고딕"/>
+                <a:cs typeface="맑은 고딕"/>
+              </a:rPr>
+              <a:t>완화와 근본 조치</a:t>
+            </a:r>
+          </a:p>
+        </p:txBody>
+      </p:sp>
+      <p:sp>
+        <p:nvSpPr>
+          <p:cNvPr id="14" name="TextBox 13"/>
+          <p:cNvSpPr txBox="1"/>
+          <p:nvPr/>
+        </p:nvSpPr>
+        <p:spPr>
+          <a:xfrm>
+            <a:off x="4023359" y="3991356"/>
+            <a:ext cx="7528255" cy="1181862"/>
+          </a:xfrm>
+          <a:prstGeom prst="rect">
+            <a:avLst/>
+          </a:prstGeom>
+          <a:noFill/>
+        </p:spPr>
+        <p:txBody>
+          <a:bodyPr wrap="square" anchor="ctr"/>
+          <a:lstStyle/>
+          <a:p>
+            <a:pPr algn="l">
+              <a:lnSpc>
+                <a:spcPct val="110000"/>
+              </a:lnSpc>
+              <a:spcAft>
+                <a:spcPts val="300"/>
+              </a:spcAft>
+            </a:pPr>
+            <a:r>
+              <a:rPr sz="1400" b="0">
+                <a:solidFill>
+                  <a:srgbClr val="1F2A3A"/>
+                </a:solidFill>
+                <a:latin typeface="맑은 고딕"/>
+                <a:ea typeface="맑은 고딕"/>
+                <a:cs typeface="맑은 고딕"/>
+              </a:rPr>
+              <a:t>이름이 다르면 뜻이 다르다. 쿨러 냉각 성능 상실에서 조치로 가는 두 관계가 그렇다.</a:t>
+            </a:r>
+          </a:p>
+          <a:p>
+            <a:pPr algn="l">
+              <a:lnSpc>
+                <a:spcPct val="110000"/>
+              </a:lnSpc>
+              <a:spcAft>
+                <a:spcPts val="300"/>
+              </a:spcAft>
+            </a:pPr>
+            <a:r>
+              <a:rPr sz="1400" b="0">
+                <a:solidFill>
+                  <a:srgbClr val="1F2A3A"/>
+                </a:solidFill>
+                <a:latin typeface="맑은 고딕"/>
+                <a:ea typeface="맑은 고딕"/>
+                <a:cs typeface="맑은 고딕"/>
+              </a:rPr>
+              <a:t>MITIGATED_BY → 팬 최대 운전: 우선 완화한다</a:t>
+            </a:r>
+          </a:p>
+          <a:p>
+            <a:pPr algn="l">
+              <a:lnSpc>
+                <a:spcPct val="110000"/>
+              </a:lnSpc>
+              <a:spcAft>
+                <a:spcPts val="300"/>
+              </a:spcAft>
+            </a:pPr>
+            <a:r>
+              <a:rPr sz="1400" b="0">
+                <a:solidFill>
+                  <a:srgbClr val="1F2A3A"/>
+                </a:solidFill>
+                <a:latin typeface="맑은 고딕"/>
+                <a:ea typeface="맑은 고딕"/>
+                <a:cs typeface="맑은 고딕"/>
+              </a:rPr>
+              <a:t>REMEDIED_BY → 쿨러 핀 세척: 근본적으로 없앤다</a:t>
+            </a:r>
+          </a:p>
+        </p:txBody>
+      </p:sp>
+      <p:sp>
+        <p:nvSpPr>
+          <p:cNvPr id="15" name="Rectangle 14"/>
           <p:cNvSpPr/>
           <p:nvPr/>
         </p:nvSpPr>
         <p:spPr>
           <a:xfrm>
-            <a:off x="6233007" y="2418588"/>
-            <a:ext cx="2567863" cy="3145535"/>
-          </a:xfrm>
-          <a:prstGeom prst="roundRect">
-            <a:avLst>
-              <a:gd name="adj" fmla="val 4000"/>
-            </a:avLst>
-          </a:prstGeom>
-          <a:solidFill>
-            <a:srgbClr val="FFFFFF"/>
-          </a:solidFill>
-          <a:ln w="15875">
-            <a:solidFill>
-              <a:srgbClr val="D3D9E1"/>
-            </a:solidFill>
-          </a:ln>
-        </p:spPr>
-        <p:txBody>
-          <a:bodyPr rtlCol="0" anchor="ctr"/>
-          <a:lstStyle/>
-          <a:p>
-            <a:pPr algn="ctr"/>
-          </a:p>
-        </p:txBody>
-      </p:sp>
-      <p:sp>
-        <p:nvSpPr>
-          <p:cNvPr id="19" name="Oval 18"/>
-          <p:cNvSpPr/>
-          <p:nvPr/>
-        </p:nvSpPr>
-        <p:spPr>
-          <a:xfrm>
-            <a:off x="6461607" y="2619756"/>
-            <a:ext cx="731520" cy="731520"/>
-          </a:xfrm>
-          <a:prstGeom prst="ellipse">
-            <a:avLst/>
-          </a:prstGeom>
-          <a:solidFill>
-            <a:srgbClr val="E7F3FD"/>
-          </a:solidFill>
-          <a:ln>
-            <a:noFill/>
-          </a:ln>
-        </p:spPr>
-        <p:txBody>
-          <a:bodyPr rtlCol="0" anchor="ctr"/>
-          <a:lstStyle/>
-          <a:p>
-            <a:pPr algn="ctr"/>
-          </a:p>
-        </p:txBody>
-      </p:sp>
-      <p:pic>
-        <p:nvPicPr>
-          <p:cNvPr id="20" name="아이콘:arrows-right" descr="arrows-right_13294B_1.6.png"/>
-          <p:cNvPicPr>
-            <a:picLocks noChangeAspect="1"/>
-          </p:cNvPicPr>
-          <p:nvPr/>
-        </p:nvPicPr>
-        <p:blipFill>
-          <a:blip r:embed="rId5"/>
-          <a:stretch>
-            <a:fillRect/>
-          </a:stretch>
-        </p:blipFill>
-        <p:spPr>
-          <a:xfrm>
-            <a:off x="6615226" y="2773375"/>
-            <a:ext cx="424281" cy="424281"/>
-          </a:xfrm>
-          <a:prstGeom prst="rect">
-            <a:avLst/>
-          </a:prstGeom>
-        </p:spPr>
-      </p:pic>
-      <p:sp>
-        <p:nvSpPr>
-          <p:cNvPr id="21" name="TextBox 20"/>
-          <p:cNvSpPr txBox="1"/>
-          <p:nvPr/>
-        </p:nvSpPr>
-        <p:spPr>
-          <a:xfrm>
-            <a:off x="6397599" y="3442716"/>
-            <a:ext cx="2238679" cy="1618487"/>
-          </a:xfrm>
-          <a:prstGeom prst="rect">
-            <a:avLst/>
-          </a:prstGeom>
-          <a:noFill/>
-        </p:spPr>
-        <p:txBody>
-          <a:bodyPr wrap="square" anchor="t"/>
-          <a:lstStyle/>
-          <a:p>
-            <a:pPr algn="l">
-              <a:lnSpc>
-                <a:spcPct val="110000"/>
-              </a:lnSpc>
-              <a:spcAft>
-                <a:spcPts val="400"/>
-              </a:spcAft>
-            </a:pPr>
-            <a:r>
-              <a:rPr sz="1800" b="1">
-                <a:solidFill>
-                  <a:srgbClr val="13294B"/>
-                </a:solidFill>
-                <a:latin typeface="맑은 고딕"/>
-                <a:ea typeface="맑은 고딕"/>
-                <a:cs typeface="맑은 고딕"/>
-              </a:rPr>
-              <a:t>관계</a:t>
-            </a:r>
-          </a:p>
-          <a:p>
-            <a:pPr algn="l">
-              <a:lnSpc>
-                <a:spcPct val="110000"/>
-              </a:lnSpc>
-              <a:spcAft>
-                <a:spcPts val="400"/>
-              </a:spcAft>
-            </a:pPr>
-            <a:r>
-              <a:rPr sz="1350" b="0">
-                <a:solidFill>
-                  <a:srgbClr val="1F2A3A"/>
-                </a:solidFill>
-                <a:latin typeface="맑은 고딕"/>
-                <a:ea typeface="맑은 고딕"/>
-                <a:cs typeface="맑은 고딕"/>
-              </a:rPr>
-              <a:t>• 대상 사이의 이름 있는 연결을 정한다</a:t>
-            </a:r>
-          </a:p>
-          <a:p>
-            <a:pPr algn="l">
-              <a:lnSpc>
-                <a:spcPct val="110000"/>
-              </a:lnSpc>
-              <a:spcAft>
-                <a:spcPts val="400"/>
-              </a:spcAft>
-            </a:pPr>
-            <a:r>
-              <a:rPr sz="1350" b="0">
-                <a:solidFill>
-                  <a:srgbClr val="1F2A3A"/>
-                </a:solidFill>
-                <a:latin typeface="맑은 고딕"/>
-                <a:ea typeface="맑은 고딕"/>
-                <a:cs typeface="맑은 고딕"/>
-              </a:rPr>
-              <a:t>• CAUSES, INDICATES, MITIGATED_BY</a:t>
-            </a:r>
-          </a:p>
-        </p:txBody>
-      </p:sp>
-      <p:sp>
-        <p:nvSpPr>
-          <p:cNvPr id="22" name="Rounded Rectangle 21"/>
-          <p:cNvSpPr/>
-          <p:nvPr/>
-        </p:nvSpPr>
-        <p:spPr>
-          <a:xfrm>
-            <a:off x="6461607" y="5134356"/>
-            <a:ext cx="1252728" cy="292608"/>
-          </a:xfrm>
-          <a:prstGeom prst="roundRect">
-            <a:avLst>
-              <a:gd name="adj" fmla="val 50000"/>
-            </a:avLst>
+            <a:off x="548640" y="5164074"/>
+            <a:ext cx="11094415" cy="13716"/>
+          </a:xfrm>
+          <a:prstGeom prst="rect">
+            <a:avLst/>
           </a:prstGeom>
           <a:solidFill>
             <a:srgbClr val="D3D9E1"/>
@@ -13951,14 +13829,14 @@
       </p:sp>
       <p:sp>
         <p:nvSpPr>
-          <p:cNvPr id="23" name="TextBox 22"/>
-          <p:cNvSpPr txBox="1"/>
-          <p:nvPr/>
-        </p:nvSpPr>
-        <p:spPr>
-          <a:xfrm>
-            <a:off x="6461607" y="5134356"/>
-            <a:ext cx="1252728" cy="292608"/>
+          <p:cNvPr id="16" name="TextBox 15"/>
+          <p:cNvSpPr txBox="1"/>
+          <p:nvPr/>
+        </p:nvSpPr>
+        <p:spPr>
+          <a:xfrm>
+            <a:off x="640080" y="5173218"/>
+            <a:ext cx="3291839" cy="1181862"/>
           </a:xfrm>
           <a:prstGeom prst="rect">
             <a:avLst/>
@@ -13969,13 +13847,16 @@
           <a:bodyPr wrap="square" anchor="ctr"/>
           <a:lstStyle/>
           <a:p>
-            <a:pPr algn="ctr">
-              <a:lnSpc>
-                <a:spcPct val="110000"/>
-              </a:lnSpc>
-            </a:pPr>
-            <a:r>
-              <a:rPr sz="1200" b="1">
+            <a:pPr algn="l">
+              <a:lnSpc>
+                <a:spcPct val="110000"/>
+              </a:lnSpc>
+              <a:spcAft>
+                <a:spcPts val="200"/>
+              </a:spcAft>
+            </a:pPr>
+            <a:r>
+              <a:rPr sz="1800" b="1">
                 <a:solidFill>
                   <a:srgbClr val="13294B"/>
                 </a:solidFill>
@@ -13983,148 +13864,62 @@
                 <a:ea typeface="맑은 고딕"/>
                 <a:cs typeface="맑은 고딕"/>
               </a:rPr>
-              <a:t>예: 일으킨다</a:t>
-            </a:r>
-          </a:p>
-        </p:txBody>
-      </p:sp>
-      <p:sp>
-        <p:nvSpPr>
-          <p:cNvPr id="24" name="Rounded Rectangle 23"/>
-          <p:cNvSpPr/>
-          <p:nvPr/>
-        </p:nvSpPr>
-        <p:spPr>
-          <a:xfrm>
-            <a:off x="9075191" y="2418588"/>
-            <a:ext cx="2567863" cy="3145535"/>
-          </a:xfrm>
-          <a:prstGeom prst="roundRect">
-            <a:avLst>
-              <a:gd name="adj" fmla="val 4000"/>
-            </a:avLst>
-          </a:prstGeom>
-          <a:solidFill>
-            <a:srgbClr val="FFFFFF"/>
-          </a:solidFill>
-          <a:ln w="28575">
-            <a:solidFill>
-              <a:srgbClr val="5CB8F2"/>
-            </a:solidFill>
-          </a:ln>
-        </p:spPr>
-        <p:txBody>
-          <a:bodyPr rtlCol="0" anchor="ctr"/>
-          <a:lstStyle/>
-          <a:p>
-            <a:pPr algn="ctr"/>
-          </a:p>
-        </p:txBody>
-      </p:sp>
-      <p:sp>
-        <p:nvSpPr>
-          <p:cNvPr id="25" name="Oval 24"/>
-          <p:cNvSpPr/>
-          <p:nvPr/>
-        </p:nvSpPr>
-        <p:spPr>
-          <a:xfrm>
-            <a:off x="9303791" y="2619756"/>
-            <a:ext cx="731520" cy="731520"/>
-          </a:xfrm>
-          <a:prstGeom prst="ellipse">
-            <a:avLst/>
-          </a:prstGeom>
-          <a:solidFill>
-            <a:srgbClr val="5CB8F2"/>
-          </a:solidFill>
-          <a:ln>
-            <a:noFill/>
-          </a:ln>
-        </p:spPr>
-        <p:txBody>
-          <a:bodyPr rtlCol="0" anchor="ctr"/>
-          <a:lstStyle/>
-          <a:p>
-            <a:pPr algn="ctr"/>
-          </a:p>
-        </p:txBody>
-      </p:sp>
-      <p:pic>
-        <p:nvPicPr>
-          <p:cNvPr id="26" name="아이콘:lock" descr="lock_13294B_1.6.png"/>
-          <p:cNvPicPr>
-            <a:picLocks noChangeAspect="1"/>
-          </p:cNvPicPr>
-          <p:nvPr/>
-        </p:nvPicPr>
-        <p:blipFill>
-          <a:blip r:embed="rId6"/>
-          <a:stretch>
-            <a:fillRect/>
-          </a:stretch>
-        </p:blipFill>
-        <p:spPr>
-          <a:xfrm>
-            <a:off x="9457410" y="2773375"/>
-            <a:ext cx="424281" cy="424281"/>
-          </a:xfrm>
-          <a:prstGeom prst="rect">
-            <a:avLst/>
-          </a:prstGeom>
-        </p:spPr>
-      </p:pic>
-      <p:sp>
-        <p:nvSpPr>
-          <p:cNvPr id="27" name="TextBox 26"/>
-          <p:cNvSpPr txBox="1"/>
-          <p:nvPr/>
-        </p:nvSpPr>
-        <p:spPr>
-          <a:xfrm>
-            <a:off x="9239783" y="3442716"/>
-            <a:ext cx="2238679" cy="1618487"/>
-          </a:xfrm>
-          <a:prstGeom prst="rect">
-            <a:avLst/>
-          </a:prstGeom>
-          <a:noFill/>
-        </p:spPr>
-        <p:txBody>
-          <a:bodyPr wrap="square" anchor="t"/>
-          <a:lstStyle/>
+              <a:t>제약</a:t>
+            </a:r>
+          </a:p>
           <a:p>
             <a:pPr algn="l">
               <a:lnSpc>
                 <a:spcPct val="110000"/>
               </a:lnSpc>
               <a:spcAft>
-                <a:spcPts val="400"/>
+                <a:spcPts val="200"/>
               </a:spcAft>
             </a:pPr>
             <a:r>
-              <a:rPr sz="1800" b="1">
-                <a:solidFill>
-                  <a:srgbClr val="13294B"/>
-                </a:solidFill>
-                <a:latin typeface="맑은 고딕"/>
-                <a:ea typeface="맑은 고딕"/>
-                <a:cs typeface="맑은 고딕"/>
-              </a:rPr>
-              <a:t>제약</a:t>
-            </a:r>
-          </a:p>
+              <a:rPr sz="1150" b="0">
+                <a:solidFill>
+                  <a:srgbClr val="556175"/>
+                </a:solidFill>
+                <a:latin typeface="맑은 고딕"/>
+                <a:ea typeface="맑은 고딕"/>
+                <a:cs typeface="맑은 고딕"/>
+              </a:rPr>
+              <a:t>양 끝의 종류</a:t>
+            </a:r>
+          </a:p>
+        </p:txBody>
+      </p:sp>
+      <p:sp>
+        <p:nvSpPr>
+          <p:cNvPr id="17" name="TextBox 16"/>
+          <p:cNvSpPr txBox="1"/>
+          <p:nvPr/>
+        </p:nvSpPr>
+        <p:spPr>
+          <a:xfrm>
+            <a:off x="4023359" y="5173218"/>
+            <a:ext cx="7528255" cy="1181862"/>
+          </a:xfrm>
+          <a:prstGeom prst="rect">
+            <a:avLst/>
+          </a:prstGeom>
+          <a:noFill/>
+        </p:spPr>
+        <p:txBody>
+          <a:bodyPr wrap="square" anchor="ctr"/>
+          <a:lstStyle/>
           <a:p>
             <a:pPr algn="l">
               <a:lnSpc>
                 <a:spcPct val="110000"/>
               </a:lnSpc>
               <a:spcAft>
-                <a:spcPts val="400"/>
+                <a:spcPts val="300"/>
               </a:spcAft>
             </a:pPr>
             <a:r>
-              <a:rPr sz="1350" b="0">
+              <a:rPr sz="1400" b="0">
                 <a:solidFill>
                   <a:srgbClr val="1F2A3A"/>
                 </a:solidFill>
@@ -14132,7 +13927,7 @@
                 <a:ea typeface="맑은 고딕"/>
                 <a:cs typeface="맑은 고딕"/>
               </a:rPr>
-              <a:t>• 지켜야 하는 조건을 정한다</a:t>
+              <a:t>관계가 어느 종류에서 어느 종류로 이어질 수 있는지를 정해 어긋난 연결을 거른다.</a:t>
             </a:r>
           </a:p>
           <a:p>
@@ -14141,11 +13936,11 @@
                 <a:spcPct val="110000"/>
               </a:lnSpc>
               <a:spcAft>
-                <a:spcPts val="400"/>
+                <a:spcPts val="300"/>
               </a:spcAft>
             </a:pPr>
             <a:r>
-              <a:rPr sz="1350" b="0">
+              <a:rPr sz="1400" b="0">
                 <a:solidFill>
                   <a:srgbClr val="1F2A3A"/>
                 </a:solidFill>
@@ -14153,77 +13948,28 @@
                 <a:ea typeface="맑은 고딕"/>
                 <a:cs typeface="맑은 고딕"/>
               </a:rPr>
-              <a:t>• CAUSES는 원인에서 고장 유형으로만 잇는다</a:t>
-            </a:r>
-          </a:p>
-        </p:txBody>
-      </p:sp>
-      <p:sp>
-        <p:nvSpPr>
-          <p:cNvPr id="28" name="Rounded Rectangle 27"/>
-          <p:cNvSpPr/>
-          <p:nvPr/>
-        </p:nvSpPr>
-        <p:spPr>
-          <a:xfrm>
-            <a:off x="9303791" y="5134356"/>
-            <a:ext cx="1496568" cy="292608"/>
-          </a:xfrm>
-          <a:prstGeom prst="roundRect">
-            <a:avLst>
-              <a:gd name="adj" fmla="val 50000"/>
-            </a:avLst>
-          </a:prstGeom>
-          <a:solidFill>
-            <a:srgbClr val="5CB8F2"/>
-          </a:solidFill>
-          <a:ln>
-            <a:noFill/>
-          </a:ln>
-        </p:spPr>
-        <p:txBody>
-          <a:bodyPr rtlCol="0" anchor="ctr"/>
-          <a:lstStyle/>
-          <a:p>
-            <a:pPr algn="ctr"/>
-          </a:p>
-        </p:txBody>
-      </p:sp>
-      <p:sp>
-        <p:nvSpPr>
-          <p:cNvPr id="29" name="TextBox 28"/>
-          <p:cNvSpPr txBox="1"/>
-          <p:nvPr/>
-        </p:nvSpPr>
-        <p:spPr>
-          <a:xfrm>
-            <a:off x="9303791" y="5134356"/>
-            <a:ext cx="1496568" cy="292608"/>
-          </a:xfrm>
-          <a:prstGeom prst="rect">
-            <a:avLst/>
-          </a:prstGeom>
-          <a:noFill/>
-        </p:spPr>
-        <p:txBody>
-          <a:bodyPr wrap="square" anchor="ctr"/>
-          <a:lstStyle/>
-          <a:p>
-            <a:pPr algn="ctr">
-              <a:lnSpc>
-                <a:spcPct val="110000"/>
-              </a:lnSpc>
-            </a:pPr>
-            <a:r>
-              <a:rPr sz="1200" b="1">
-                <a:solidFill>
-                  <a:srgbClr val="13294B"/>
-                </a:solidFill>
-                <a:latin typeface="맑은 고딕"/>
-                <a:ea typeface="맑은 고딕"/>
-                <a:cs typeface="맑은 고딕"/>
-              </a:rPr>
-              <a:t>예: 양 끝의 종류</a:t>
+              <a:t>쿨러 핀 오염 — CAUSES → 쿨러 냉각 성능 상실: 원인 → 고장 유형, 정의에 맞는다</a:t>
+            </a:r>
+          </a:p>
+          <a:p>
+            <a:pPr algn="l">
+              <a:lnSpc>
+                <a:spcPct val="110000"/>
+              </a:lnSpc>
+              <a:spcAft>
+                <a:spcPts val="300"/>
+              </a:spcAft>
+            </a:pPr>
+            <a:r>
+              <a:rPr sz="1400" b="0">
+                <a:solidFill>
+                  <a:srgbClr val="1F2A3A"/>
+                </a:solidFill>
+                <a:latin typeface="맑은 고딕"/>
+                <a:ea typeface="맑은 고딕"/>
+                <a:cs typeface="맑은 고딕"/>
+              </a:rPr>
+              <a:t>유온 상승 — CAUSES → 팬 최대 운전: 증상 → 조치, 정의에 어긋난다</a:t>
             </a:r>
           </a:p>
         </p:txBody>
@@ -15471,7 +15217,7 @@
       </p:sp>
       <p:pic>
         <p:nvPicPr>
-          <p:cNvPr id="6" name="삽화:유형과대상_0.svg" descr="illust_2867430417216326224_1791717240.png"/>
+          <p:cNvPr id="6" name="삽화:유형과대상_0.svg" descr="illust_3050374311256040071_1791717240.png"/>
           <p:cNvPicPr>
             <a:picLocks noChangeAspect="1"/>
           </p:cNvPicPr>
@@ -16927,7 +16673,7 @@
       </p:sp>
       <p:pic>
         <p:nvPicPr>
-          <p:cNvPr id="6" name="삽화:설비클래스_0.svg" descr="illust_713796824596120704_1791717240.png"/>
+          <p:cNvPr id="6" name="삽화:설비클래스_0.svg" descr="illust_8892181972777693738_1791717240.png"/>
           <p:cNvPicPr>
             <a:picLocks noChangeAspect="1"/>
           </p:cNvPicPr>
@@ -19260,7 +19006,7 @@
       </p:sp>
       <p:pic>
         <p:nvPicPr>
-          <p:cNvPr id="6" name="삽화:속성_3.svg" descr="illust_2648817405317862939_1791717240.png"/>
+          <p:cNvPr id="6" name="삽화:속성_3.svg" descr="illust_3400525109411399188_1791717240.png"/>
           <p:cNvPicPr>
             <a:picLocks noChangeAspect="1"/>
           </p:cNvPicPr>
@@ -32273,7 +32019,7 @@
                 <a:ea typeface="맑은 고딕"/>
                 <a:cs typeface="맑은 고딕"/>
               </a:rPr>
-              <a:t>원인 후보를 가리고 조치안을 비교한 시간이다. 그동안 유온은 61.8 ℃까지 올랐다.</a:t>
+              <a:t>원인을 가리고 조치안을 비교하는 데 약 94초, 승인 대기에 약 13초. 유온은 61.8 ℃까지 올랐다.</a:t>
             </a:r>
           </a:p>
         </p:txBody>
@@ -33782,7 +33528,7 @@
       </p:sp>
       <p:pic>
         <p:nvPicPr>
-          <p:cNvPr id="6" name="삽화:원인후보.svg" descr="illust_7756461402864963915_1791712364.png"/>
+          <p:cNvPr id="6" name="삽화:원인후보.svg" descr="illust_3887348189070004356_1791712364.png"/>
           <p:cNvPicPr>
             <a:picLocks noChangeAspect="1"/>
           </p:cNvPicPr>
@@ -35299,7 +35045,7 @@
                 <a:ea typeface="맑은 고딕"/>
                 <a:cs typeface="맑은 고딕"/>
               </a:rPr>
-              <a:t>수치에 의미를 붙이면 정보가 되고, 정보가 다른 대상과 이어져 판단에 쓰일 수 있을 때 지식이 된다.</a:t>
+              <a:t>수치에 대상, 단위, 기준이 붙어야 정보가 되고, 정보가 원인과 조치로 이어져야 왜와 무엇을에 답하는 지식이 된다.</a:t>
             </a:r>
           </a:p>
         </p:txBody>
@@ -35374,101 +35120,19 @@
       </p:sp>
       <p:sp>
         <p:nvSpPr>
-          <p:cNvPr id="6" name="Rectangle 5"/>
+          <p:cNvPr id="6" name="Rounded Rectangle 5"/>
           <p:cNvSpPr/>
           <p:nvPr/>
         </p:nvSpPr>
         <p:spPr>
           <a:xfrm>
-            <a:off x="2397709" y="3042094"/>
-            <a:ext cx="7396276" cy="36576"/>
-          </a:xfrm>
-          <a:prstGeom prst="rect">
-            <a:avLst/>
-          </a:prstGeom>
-          <a:solidFill>
-            <a:srgbClr val="D3D9E1"/>
-          </a:solidFill>
-          <a:ln>
-            <a:noFill/>
-          </a:ln>
-        </p:spPr>
-        <p:txBody>
-          <a:bodyPr rtlCol="0" anchor="ctr"/>
-          <a:lstStyle/>
-          <a:p>
-            <a:pPr algn="ctr"/>
-          </a:p>
-        </p:txBody>
-      </p:sp>
-      <p:sp>
-        <p:nvSpPr>
-          <p:cNvPr id="7" name="Oval 6"/>
-          <p:cNvSpPr/>
-          <p:nvPr/>
-        </p:nvSpPr>
-        <p:spPr>
-          <a:xfrm>
-            <a:off x="1963369" y="2626042"/>
-            <a:ext cx="868680" cy="868680"/>
-          </a:xfrm>
-          <a:prstGeom prst="ellipse">
-            <a:avLst/>
-          </a:prstGeom>
-          <a:solidFill>
-            <a:srgbClr val="FFFFFF"/>
-          </a:solidFill>
-          <a:ln w="25400">
-            <a:solidFill>
-              <a:srgbClr val="13294B"/>
-            </a:solidFill>
-          </a:ln>
-        </p:spPr>
-        <p:txBody>
-          <a:bodyPr rtlCol="0" anchor="ctr"/>
-          <a:lstStyle/>
-          <a:p>
-            <a:pPr algn="ctr"/>
-          </a:p>
-        </p:txBody>
-      </p:sp>
-      <p:pic>
-        <p:nvPicPr>
-          <p:cNvPr id="8" name="아이콘:hash" descr="hash_13294B_1.6.png"/>
-          <p:cNvPicPr>
-            <a:picLocks noChangeAspect="1"/>
-          </p:cNvPicPr>
-          <p:nvPr/>
-        </p:nvPicPr>
-        <p:blipFill>
-          <a:blip r:embed="rId3"/>
-          <a:stretch>
-            <a:fillRect/>
-          </a:stretch>
-        </p:blipFill>
-        <p:spPr>
-          <a:xfrm>
-            <a:off x="2180539" y="2843212"/>
-            <a:ext cx="434340" cy="434340"/>
-          </a:xfrm>
-          <a:prstGeom prst="rect">
-            <a:avLst/>
-          </a:prstGeom>
-        </p:spPr>
-      </p:pic>
-      <p:sp>
-        <p:nvSpPr>
-          <p:cNvPr id="9" name="Oval 8"/>
-          <p:cNvSpPr/>
-          <p:nvPr/>
-        </p:nvSpPr>
-        <p:spPr>
-          <a:xfrm>
-            <a:off x="2557729" y="2580322"/>
-            <a:ext cx="347472" cy="347472"/>
-          </a:xfrm>
-          <a:prstGeom prst="ellipse">
-            <a:avLst/>
+            <a:off x="548640" y="1627632"/>
+            <a:ext cx="11094415" cy="347472"/>
+          </a:xfrm>
+          <a:prstGeom prst="roundRect">
+            <a:avLst>
+              <a:gd name="adj" fmla="val 12000"/>
+            </a:avLst>
           </a:prstGeom>
           <a:solidFill>
             <a:srgbClr val="13294B"/>
@@ -35487,14 +35151,14 @@
       </p:sp>
       <p:sp>
         <p:nvSpPr>
-          <p:cNvPr id="10" name="TextBox 9"/>
-          <p:cNvSpPr txBox="1"/>
-          <p:nvPr/>
-        </p:nvSpPr>
-        <p:spPr>
-          <a:xfrm>
-            <a:off x="2557729" y="2580322"/>
-            <a:ext cx="347472" cy="347472"/>
+          <p:cNvPr id="7" name="TextBox 6"/>
+          <p:cNvSpPr txBox="1"/>
+          <p:nvPr/>
+        </p:nvSpPr>
+        <p:spPr>
+          <a:xfrm>
+            <a:off x="685800" y="1627632"/>
+            <a:ext cx="2514600" cy="347472"/>
           </a:xfrm>
           <a:prstGeom prst="rect">
             <a:avLst/>
@@ -35505,13 +35169,13 @@
           <a:bodyPr wrap="square" anchor="ctr"/>
           <a:lstStyle/>
           <a:p>
-            <a:pPr algn="ctr">
-              <a:lnSpc>
-                <a:spcPct val="110000"/>
-              </a:lnSpc>
-            </a:pPr>
-            <a:r>
-              <a:rPr sz="1200" b="1">
+            <a:pPr algn="l">
+              <a:lnSpc>
+                <a:spcPct val="110000"/>
+              </a:lnSpc>
+            </a:pPr>
+            <a:r>
+              <a:rPr sz="1300" b="1">
                 <a:solidFill>
                   <a:srgbClr val="FFFFFF"/>
                 </a:solidFill>
@@ -35519,166 +35183,107 @@
                 <a:ea typeface="맑은 고딕"/>
                 <a:cs typeface="맑은 고딕"/>
               </a:rPr>
-              <a:t>1</a:t>
-            </a:r>
-          </a:p>
-        </p:txBody>
-      </p:sp>
-      <p:sp>
-        <p:nvSpPr>
-          <p:cNvPr id="11" name="TextBox 10"/>
-          <p:cNvSpPr txBox="1"/>
-          <p:nvPr/>
-        </p:nvSpPr>
-        <p:spPr>
-          <a:xfrm>
-            <a:off x="621792" y="3677602"/>
-            <a:ext cx="3551834" cy="1679066"/>
-          </a:xfrm>
-          <a:prstGeom prst="rect">
-            <a:avLst/>
-          </a:prstGeom>
-          <a:noFill/>
-        </p:spPr>
-        <p:txBody>
-          <a:bodyPr wrap="square" anchor="t"/>
-          <a:lstStyle/>
-          <a:p>
-            <a:pPr algn="ctr">
-              <a:lnSpc>
-                <a:spcPct val="110000"/>
-              </a:lnSpc>
-              <a:spcAft>
-                <a:spcPts val="400"/>
-              </a:spcAft>
-            </a:pPr>
-            <a:r>
-              <a:rPr sz="1700" b="1">
-                <a:solidFill>
-                  <a:srgbClr val="13294B"/>
-                </a:solidFill>
-                <a:latin typeface="맑은 고딕"/>
-                <a:ea typeface="맑은 고딕"/>
-                <a:cs typeface="맑은 고딕"/>
-              </a:rPr>
-              <a:t>데이터</a:t>
-            </a:r>
-          </a:p>
-          <a:p>
-            <a:pPr algn="ctr">
-              <a:lnSpc>
-                <a:spcPct val="110000"/>
-              </a:lnSpc>
-              <a:spcAft>
-                <a:spcPts val="400"/>
-              </a:spcAft>
-            </a:pPr>
-            <a:r>
-              <a:rPr sz="1350" b="0">
-                <a:solidFill>
-                  <a:srgbClr val="1F2A3A"/>
-                </a:solidFill>
-                <a:latin typeface="맑은 고딕"/>
-                <a:ea typeface="맑은 고딕"/>
-                <a:cs typeface="맑은 고딕"/>
-              </a:rPr>
-              <a:t>개별 수치이다</a:t>
-            </a:r>
-          </a:p>
-          <a:p>
-            <a:pPr algn="ctr">
-              <a:lnSpc>
-                <a:spcPct val="110000"/>
-              </a:lnSpc>
-              <a:spcAft>
-                <a:spcPts val="400"/>
-              </a:spcAft>
-            </a:pPr>
-            <a:r>
-              <a:rPr sz="1350" b="0">
-                <a:solidFill>
-                  <a:srgbClr val="1F2A3A"/>
-                </a:solidFill>
-                <a:latin typeface="맑은 고딕"/>
-                <a:ea typeface="맑은 고딕"/>
-                <a:cs typeface="맑은 고딕"/>
-              </a:rPr>
-              <a:t>55.71</a:t>
-            </a:r>
-          </a:p>
-        </p:txBody>
-      </p:sp>
-      <p:sp>
-        <p:nvSpPr>
-          <p:cNvPr id="12" name="Oval 11"/>
+              <a:t>구분</a:t>
+            </a:r>
+          </a:p>
+        </p:txBody>
+      </p:sp>
+      <p:sp>
+        <p:nvSpPr>
+          <p:cNvPr id="8" name="TextBox 7"/>
+          <p:cNvSpPr txBox="1"/>
+          <p:nvPr/>
+        </p:nvSpPr>
+        <p:spPr>
+          <a:xfrm>
+            <a:off x="3200400" y="1627632"/>
+            <a:ext cx="6248095" cy="347472"/>
+          </a:xfrm>
+          <a:prstGeom prst="rect">
+            <a:avLst/>
+          </a:prstGeom>
+          <a:noFill/>
+        </p:spPr>
+        <p:txBody>
+          <a:bodyPr wrap="square" anchor="ctr"/>
+          <a:lstStyle/>
+          <a:p>
+            <a:pPr algn="l">
+              <a:lnSpc>
+                <a:spcPct val="110000"/>
+              </a:lnSpc>
+            </a:pPr>
+            <a:r>
+              <a:rPr sz="1300" b="1">
+                <a:solidFill>
+                  <a:srgbClr val="FFFFFF"/>
+                </a:solidFill>
+                <a:latin typeface="맑은 고딕"/>
+                <a:ea typeface="맑은 고딕"/>
+                <a:cs typeface="맑은 고딕"/>
+              </a:rPr>
+              <a:t>내용</a:t>
+            </a:r>
+          </a:p>
+        </p:txBody>
+      </p:sp>
+      <p:sp>
+        <p:nvSpPr>
+          <p:cNvPr id="9" name="TextBox 8"/>
+          <p:cNvSpPr txBox="1"/>
+          <p:nvPr/>
+        </p:nvSpPr>
+        <p:spPr>
+          <a:xfrm>
+            <a:off x="9448495" y="1627632"/>
+            <a:ext cx="2194560" cy="347472"/>
+          </a:xfrm>
+          <a:prstGeom prst="rect">
+            <a:avLst/>
+          </a:prstGeom>
+          <a:noFill/>
+        </p:spPr>
+        <p:txBody>
+          <a:bodyPr wrap="square" anchor="ctr"/>
+          <a:lstStyle/>
+          <a:p>
+            <a:pPr algn="l">
+              <a:lnSpc>
+                <a:spcPct val="110000"/>
+              </a:lnSpc>
+            </a:pPr>
+            <a:r>
+              <a:rPr sz="1300" b="1">
+                <a:solidFill>
+                  <a:srgbClr val="FFFFFF"/>
+                </a:solidFill>
+                <a:latin typeface="맑은 고딕"/>
+                <a:ea typeface="맑은 고딕"/>
+                <a:cs typeface="맑은 고딕"/>
+              </a:rPr>
+              <a:t>답할 수 있는 것</a:t>
+            </a:r>
+          </a:p>
+        </p:txBody>
+      </p:sp>
+      <p:sp>
+        <p:nvSpPr>
+          <p:cNvPr id="10" name="Rounded Rectangle 9"/>
           <p:cNvSpPr/>
           <p:nvPr/>
         </p:nvSpPr>
         <p:spPr>
           <a:xfrm>
-            <a:off x="5661507" y="2626042"/>
-            <a:ext cx="868680" cy="868680"/>
-          </a:xfrm>
-          <a:prstGeom prst="ellipse">
-            <a:avLst/>
+            <a:off x="548640" y="2061972"/>
+            <a:ext cx="11094415" cy="801014"/>
+          </a:xfrm>
+          <a:prstGeom prst="roundRect">
+            <a:avLst>
+              <a:gd name="adj" fmla="val 8000"/>
+            </a:avLst>
           </a:prstGeom>
           <a:solidFill>
-            <a:srgbClr val="FFFFFF"/>
-          </a:solidFill>
-          <a:ln w="25400">
-            <a:solidFill>
-              <a:srgbClr val="13294B"/>
-            </a:solidFill>
-          </a:ln>
-        </p:spPr>
-        <p:txBody>
-          <a:bodyPr rtlCol="0" anchor="ctr"/>
-          <a:lstStyle/>
-          <a:p>
-            <a:pPr algn="ctr"/>
-          </a:p>
-        </p:txBody>
-      </p:sp>
-      <p:pic>
-        <p:nvPicPr>
-          <p:cNvPr id="13" name="아이콘:info-circle" descr="info-circle_13294B_1.6.png"/>
-          <p:cNvPicPr>
-            <a:picLocks noChangeAspect="1"/>
-          </p:cNvPicPr>
-          <p:nvPr/>
-        </p:nvPicPr>
-        <p:blipFill>
-          <a:blip r:embed="rId4"/>
-          <a:stretch>
-            <a:fillRect/>
-          </a:stretch>
-        </p:blipFill>
-        <p:spPr>
-          <a:xfrm>
-            <a:off x="5878677" y="2843212"/>
-            <a:ext cx="434340" cy="434340"/>
-          </a:xfrm>
-          <a:prstGeom prst="rect">
-            <a:avLst/>
-          </a:prstGeom>
-        </p:spPr>
-      </p:pic>
-      <p:sp>
-        <p:nvSpPr>
-          <p:cNvPr id="14" name="Oval 13"/>
-          <p:cNvSpPr/>
-          <p:nvPr/>
-        </p:nvSpPr>
-        <p:spPr>
-          <a:xfrm>
-            <a:off x="6255867" y="2580322"/>
-            <a:ext cx="347472" cy="347472"/>
-          </a:xfrm>
-          <a:prstGeom prst="ellipse">
-            <a:avLst/>
-          </a:prstGeom>
-          <a:solidFill>
-            <a:srgbClr val="13294B"/>
+            <a:srgbClr val="F3F6F9"/>
           </a:solidFill>
           <a:ln>
             <a:noFill/>
@@ -35694,14 +35299,14 @@
       </p:sp>
       <p:sp>
         <p:nvSpPr>
-          <p:cNvPr id="15" name="TextBox 14"/>
-          <p:cNvSpPr txBox="1"/>
-          <p:nvPr/>
-        </p:nvSpPr>
-        <p:spPr>
-          <a:xfrm>
-            <a:off x="6255867" y="2580322"/>
-            <a:ext cx="347472" cy="347472"/>
+          <p:cNvPr id="11" name="TextBox 10"/>
+          <p:cNvSpPr txBox="1"/>
+          <p:nvPr/>
+        </p:nvSpPr>
+        <p:spPr>
+          <a:xfrm>
+            <a:off x="685800" y="2029968"/>
+            <a:ext cx="2514600" cy="865022"/>
           </a:xfrm>
           <a:prstGeom prst="rect">
             <a:avLst/>
@@ -35712,55 +35317,13 @@
           <a:bodyPr wrap="square" anchor="ctr"/>
           <a:lstStyle/>
           <a:p>
-            <a:pPr algn="ctr">
-              <a:lnSpc>
-                <a:spcPct val="110000"/>
-              </a:lnSpc>
-            </a:pPr>
-            <a:r>
-              <a:rPr sz="1200" b="1">
-                <a:solidFill>
-                  <a:srgbClr val="FFFFFF"/>
-                </a:solidFill>
-                <a:latin typeface="맑은 고딕"/>
-                <a:ea typeface="맑은 고딕"/>
-                <a:cs typeface="맑은 고딕"/>
-              </a:rPr>
-              <a:t>2</a:t>
-            </a:r>
-          </a:p>
-        </p:txBody>
-      </p:sp>
-      <p:sp>
-        <p:nvSpPr>
-          <p:cNvPr id="16" name="TextBox 15"/>
-          <p:cNvSpPr txBox="1"/>
-          <p:nvPr/>
-        </p:nvSpPr>
-        <p:spPr>
-          <a:xfrm>
-            <a:off x="4319930" y="3677602"/>
-            <a:ext cx="3551834" cy="1679066"/>
-          </a:xfrm>
-          <a:prstGeom prst="rect">
-            <a:avLst/>
-          </a:prstGeom>
-          <a:noFill/>
-        </p:spPr>
-        <p:txBody>
-          <a:bodyPr wrap="square" anchor="t"/>
-          <a:lstStyle/>
-          <a:p>
-            <a:pPr algn="ctr">
-              <a:lnSpc>
-                <a:spcPct val="110000"/>
-              </a:lnSpc>
-              <a:spcAft>
-                <a:spcPts val="400"/>
-              </a:spcAft>
-            </a:pPr>
-            <a:r>
-              <a:rPr sz="1700" b="1">
+            <a:pPr algn="l">
+              <a:lnSpc>
+                <a:spcPct val="110000"/>
+              </a:lnSpc>
+            </a:pPr>
+            <a:r>
+              <a:rPr sz="1600" b="1">
                 <a:solidFill>
                   <a:srgbClr val="13294B"/>
                 </a:solidFill>
@@ -35768,20 +35331,38 @@
                 <a:ea typeface="맑은 고딕"/>
                 <a:cs typeface="맑은 고딕"/>
               </a:rPr>
-              <a:t>정보</a:t>
-            </a:r>
-          </a:p>
-          <a:p>
-            <a:pPr algn="ctr">
-              <a:lnSpc>
-                <a:spcPct val="110000"/>
-              </a:lnSpc>
-              <a:spcAft>
-                <a:spcPts val="400"/>
-              </a:spcAft>
-            </a:pPr>
-            <a:r>
-              <a:rPr sz="1350" b="0">
+              <a:t>데이터</a:t>
+            </a:r>
+          </a:p>
+        </p:txBody>
+      </p:sp>
+      <p:sp>
+        <p:nvSpPr>
+          <p:cNvPr id="12" name="TextBox 11"/>
+          <p:cNvSpPr txBox="1"/>
+          <p:nvPr/>
+        </p:nvSpPr>
+        <p:spPr>
+          <a:xfrm>
+            <a:off x="3200400" y="2029968"/>
+            <a:ext cx="6156655" cy="865022"/>
+          </a:xfrm>
+          <a:prstGeom prst="rect">
+            <a:avLst/>
+          </a:prstGeom>
+          <a:noFill/>
+        </p:spPr>
+        <p:txBody>
+          <a:bodyPr wrap="square" anchor="ctr"/>
+          <a:lstStyle/>
+          <a:p>
+            <a:pPr algn="l">
+              <a:lnSpc>
+                <a:spcPct val="110000"/>
+              </a:lnSpc>
+            </a:pPr>
+            <a:r>
+              <a:rPr sz="1400" b="0">
                 <a:solidFill>
                   <a:srgbClr val="1F2A3A"/>
                 </a:solidFill>
@@ -35789,20 +35370,17 @@
                 <a:ea typeface="맑은 고딕"/>
                 <a:cs typeface="맑은 고딕"/>
               </a:rPr>
-              <a:t>수치에 의미를 붙인 것이다</a:t>
-            </a:r>
-          </a:p>
-          <a:p>
-            <a:pPr algn="ctr">
-              <a:lnSpc>
-                <a:spcPct val="110000"/>
-              </a:lnSpc>
-              <a:spcAft>
-                <a:spcPts val="400"/>
-              </a:spcAft>
-            </a:pPr>
-            <a:r>
-              <a:rPr sz="1350" b="0">
+              <a:t>46.2</a:t>
+            </a:r>
+          </a:p>
+          <a:p>
+            <a:pPr algn="l">
+              <a:lnSpc>
+                <a:spcPct val="110000"/>
+              </a:lnSpc>
+            </a:pPr>
+            <a:r>
+              <a:rPr sz="1400" b="0">
                 <a:solidFill>
                   <a:srgbClr val="1F2A3A"/>
                 </a:solidFill>
@@ -35810,48 +35388,68 @@
                 <a:ea typeface="맑은 고딕"/>
                 <a:cs typeface="맑은 고딕"/>
               </a:rPr>
-              <a:t>HYD-01의 유온 TS1이 55.71 ℃로</a:t>
-            </a:r>
-          </a:p>
-          <a:p>
-            <a:pPr algn="ctr">
-              <a:lnSpc>
-                <a:spcPct val="110000"/>
-              </a:lnSpc>
-              <a:spcAft>
-                <a:spcPts val="400"/>
-              </a:spcAft>
-            </a:pPr>
-            <a:r>
-              <a:rPr sz="1350" b="0">
-                <a:solidFill>
-                  <a:srgbClr val="1F2A3A"/>
-                </a:solidFill>
-                <a:latin typeface="맑은 고딕"/>
-                <a:ea typeface="맑은 고딕"/>
-                <a:cs typeface="맑은 고딕"/>
-              </a:rPr>
-              <a:t>기준 55 ℃를 넘었다</a:t>
-            </a:r>
-          </a:p>
-        </p:txBody>
-      </p:sp>
-      <p:sp>
-        <p:nvSpPr>
-          <p:cNvPr id="17" name="Oval 16"/>
+              <a:t>무엇을 잰 값인지, 단위가 무엇인지, 높은지 정상인지 알 수 없다</a:t>
+            </a:r>
+          </a:p>
+        </p:txBody>
+      </p:sp>
+      <p:sp>
+        <p:nvSpPr>
+          <p:cNvPr id="13" name="TextBox 12"/>
+          <p:cNvSpPr txBox="1"/>
+          <p:nvPr/>
+        </p:nvSpPr>
+        <p:spPr>
+          <a:xfrm>
+            <a:off x="9448495" y="2029968"/>
+            <a:ext cx="2103120" cy="865022"/>
+          </a:xfrm>
+          <a:prstGeom prst="rect">
+            <a:avLst/>
+          </a:prstGeom>
+          <a:noFill/>
+        </p:spPr>
+        <p:txBody>
+          <a:bodyPr wrap="square" anchor="ctr"/>
+          <a:lstStyle/>
+          <a:p>
+            <a:pPr algn="l">
+              <a:lnSpc>
+                <a:spcPct val="110000"/>
+              </a:lnSpc>
+            </a:pPr>
+            <a:r>
+              <a:rPr sz="1250" b="1">
+                <a:solidFill>
+                  <a:srgbClr val="556175"/>
+                </a:solidFill>
+                <a:latin typeface="맑은 고딕"/>
+                <a:ea typeface="맑은 고딕"/>
+                <a:cs typeface="맑은 고딕"/>
+              </a:rPr>
+              <a:t>없음</a:t>
+            </a:r>
+          </a:p>
+        </p:txBody>
+      </p:sp>
+      <p:sp>
+        <p:nvSpPr>
+          <p:cNvPr id="14" name="Rounded Rectangle 13"/>
           <p:cNvSpPr/>
           <p:nvPr/>
         </p:nvSpPr>
         <p:spPr>
           <a:xfrm>
-            <a:off x="9359646" y="2626042"/>
-            <a:ext cx="868680" cy="868680"/>
-          </a:xfrm>
-          <a:prstGeom prst="ellipse">
-            <a:avLst/>
+            <a:off x="548640" y="2926994"/>
+            <a:ext cx="11094415" cy="801014"/>
+          </a:xfrm>
+          <a:prstGeom prst="roundRect">
+            <a:avLst>
+              <a:gd name="adj" fmla="val 8000"/>
+            </a:avLst>
           </a:prstGeom>
           <a:solidFill>
-            <a:srgbClr val="5CB8F2"/>
+            <a:srgbClr val="F3F6F9"/>
           </a:solidFill>
           <a:ln>
             <a:noFill/>
@@ -35865,46 +35463,159 @@
           </a:p>
         </p:txBody>
       </p:sp>
-      <p:pic>
-        <p:nvPicPr>
-          <p:cNvPr id="18" name="아이콘:bulb" descr="bulb_13294B_1.6.png"/>
-          <p:cNvPicPr>
-            <a:picLocks noChangeAspect="1"/>
-          </p:cNvPicPr>
-          <p:nvPr/>
-        </p:nvPicPr>
-        <p:blipFill>
-          <a:blip r:embed="rId5"/>
-          <a:stretch>
-            <a:fillRect/>
-          </a:stretch>
-        </p:blipFill>
-        <p:spPr>
-          <a:xfrm>
-            <a:off x="9576816" y="2843212"/>
-            <a:ext cx="434340" cy="434340"/>
-          </a:xfrm>
-          <a:prstGeom prst="rect">
-            <a:avLst/>
-          </a:prstGeom>
-        </p:spPr>
-      </p:pic>
-      <p:sp>
-        <p:nvSpPr>
-          <p:cNvPr id="19" name="Oval 18"/>
+      <p:sp>
+        <p:nvSpPr>
+          <p:cNvPr id="15" name="TextBox 14"/>
+          <p:cNvSpPr txBox="1"/>
+          <p:nvPr/>
+        </p:nvSpPr>
+        <p:spPr>
+          <a:xfrm>
+            <a:off x="685800" y="2894990"/>
+            <a:ext cx="2514600" cy="865022"/>
+          </a:xfrm>
+          <a:prstGeom prst="rect">
+            <a:avLst/>
+          </a:prstGeom>
+          <a:noFill/>
+        </p:spPr>
+        <p:txBody>
+          <a:bodyPr wrap="square" anchor="ctr"/>
+          <a:lstStyle/>
+          <a:p>
+            <a:pPr algn="l">
+              <a:lnSpc>
+                <a:spcPct val="110000"/>
+              </a:lnSpc>
+            </a:pPr>
+            <a:r>
+              <a:rPr sz="1600" b="1">
+                <a:solidFill>
+                  <a:srgbClr val="13294B"/>
+                </a:solidFill>
+                <a:latin typeface="맑은 고딕"/>
+                <a:ea typeface="맑은 고딕"/>
+                <a:cs typeface="맑은 고딕"/>
+              </a:rPr>
+              <a:t>정보</a:t>
+            </a:r>
+          </a:p>
+        </p:txBody>
+      </p:sp>
+      <p:sp>
+        <p:nvSpPr>
+          <p:cNvPr id="16" name="TextBox 15"/>
+          <p:cNvSpPr txBox="1"/>
+          <p:nvPr/>
+        </p:nvSpPr>
+        <p:spPr>
+          <a:xfrm>
+            <a:off x="3200400" y="2894990"/>
+            <a:ext cx="6156655" cy="865022"/>
+          </a:xfrm>
+          <a:prstGeom prst="rect">
+            <a:avLst/>
+          </a:prstGeom>
+          <a:noFill/>
+        </p:spPr>
+        <p:txBody>
+          <a:bodyPr wrap="square" anchor="ctr"/>
+          <a:lstStyle/>
+          <a:p>
+            <a:pPr algn="l">
+              <a:lnSpc>
+                <a:spcPct val="110000"/>
+              </a:lnSpc>
+            </a:pPr>
+            <a:r>
+              <a:rPr sz="1400" b="0">
+                <a:solidFill>
+                  <a:srgbClr val="1F2A3A"/>
+                </a:solidFill>
+                <a:latin typeface="맑은 고딕"/>
+                <a:ea typeface="맑은 고딕"/>
+                <a:cs typeface="맑은 고딕"/>
+              </a:rPr>
+              <a:t>HYD-01의 냉각 효율이 46.2 %이다</a:t>
+            </a:r>
+          </a:p>
+          <a:p>
+            <a:pPr algn="l">
+              <a:lnSpc>
+                <a:spcPct val="110000"/>
+              </a:lnSpc>
+            </a:pPr>
+            <a:r>
+              <a:rPr sz="1400" b="0">
+                <a:solidFill>
+                  <a:srgbClr val="1F2A3A"/>
+                </a:solidFill>
+                <a:latin typeface="맑은 고딕"/>
+                <a:ea typeface="맑은 고딕"/>
+                <a:cs typeface="맑은 고딕"/>
+              </a:rPr>
+              <a:t>수치에 대상과 단위가 붙었다</a:t>
+            </a:r>
+          </a:p>
+        </p:txBody>
+      </p:sp>
+      <p:sp>
+        <p:nvSpPr>
+          <p:cNvPr id="17" name="TextBox 16"/>
+          <p:cNvSpPr txBox="1"/>
+          <p:nvPr/>
+        </p:nvSpPr>
+        <p:spPr>
+          <a:xfrm>
+            <a:off x="9448495" y="2894990"/>
+            <a:ext cx="2103120" cy="865022"/>
+          </a:xfrm>
+          <a:prstGeom prst="rect">
+            <a:avLst/>
+          </a:prstGeom>
+          <a:noFill/>
+        </p:spPr>
+        <p:txBody>
+          <a:bodyPr wrap="square" anchor="ctr"/>
+          <a:lstStyle/>
+          <a:p>
+            <a:pPr algn="l">
+              <a:lnSpc>
+                <a:spcPct val="110000"/>
+              </a:lnSpc>
+            </a:pPr>
+            <a:r>
+              <a:rPr sz="1250" b="1">
+                <a:solidFill>
+                  <a:srgbClr val="556175"/>
+                </a:solidFill>
+                <a:latin typeface="맑은 고딕"/>
+                <a:ea typeface="맑은 고딕"/>
+                <a:cs typeface="맑은 고딕"/>
+              </a:rPr>
+              <a:t>지금 얼마인가</a:t>
+            </a:r>
+          </a:p>
+        </p:txBody>
+      </p:sp>
+      <p:sp>
+        <p:nvSpPr>
+          <p:cNvPr id="18" name="Rounded Rectangle 17"/>
           <p:cNvSpPr/>
           <p:nvPr/>
         </p:nvSpPr>
         <p:spPr>
           <a:xfrm>
-            <a:off x="9954006" y="2580322"/>
-            <a:ext cx="347472" cy="347472"/>
-          </a:xfrm>
-          <a:prstGeom prst="ellipse">
-            <a:avLst/>
+            <a:off x="548640" y="3792016"/>
+            <a:ext cx="11094415" cy="801014"/>
+          </a:xfrm>
+          <a:prstGeom prst="roundRect">
+            <a:avLst>
+              <a:gd name="adj" fmla="val 8000"/>
+            </a:avLst>
           </a:prstGeom>
           <a:solidFill>
-            <a:srgbClr val="13294B"/>
+            <a:srgbClr val="F3F6F9"/>
           </a:solidFill>
           <a:ln>
             <a:noFill/>
@@ -35920,14 +35631,53 @@
       </p:sp>
       <p:sp>
         <p:nvSpPr>
+          <p:cNvPr id="19" name="TextBox 18"/>
+          <p:cNvSpPr txBox="1"/>
+          <p:nvPr/>
+        </p:nvSpPr>
+        <p:spPr>
+          <a:xfrm>
+            <a:off x="685800" y="3760012"/>
+            <a:ext cx="2514600" cy="865022"/>
+          </a:xfrm>
+          <a:prstGeom prst="rect">
+            <a:avLst/>
+          </a:prstGeom>
+          <a:noFill/>
+        </p:spPr>
+        <p:txBody>
+          <a:bodyPr wrap="square" anchor="ctr"/>
+          <a:lstStyle/>
+          <a:p>
+            <a:pPr algn="l">
+              <a:lnSpc>
+                <a:spcPct val="110000"/>
+              </a:lnSpc>
+            </a:pPr>
+            <a:r>
+              <a:rPr sz="1600" b="1">
+                <a:solidFill>
+                  <a:srgbClr val="13294B"/>
+                </a:solidFill>
+                <a:latin typeface="맑은 고딕"/>
+                <a:ea typeface="맑은 고딕"/>
+                <a:cs typeface="맑은 고딕"/>
+              </a:rPr>
+              <a:t>정보</a:t>
+            </a:r>
+          </a:p>
+        </p:txBody>
+      </p:sp>
+      <p:sp>
+        <p:nvSpPr>
           <p:cNvPr id="20" name="TextBox 19"/>
           <p:cNvSpPr txBox="1"/>
           <p:nvPr/>
         </p:nvSpPr>
         <p:spPr>
           <a:xfrm>
-            <a:off x="9954006" y="2580322"/>
-            <a:ext cx="347472" cy="347472"/>
+            <a:off x="3200400" y="3760012"/>
+            <a:ext cx="6156655" cy="865022"/>
           </a:xfrm>
           <a:prstGeom prst="rect">
             <a:avLst/>
@@ -35938,21 +35688,39 @@
           <a:bodyPr wrap="square" anchor="ctr"/>
           <a:lstStyle/>
           <a:p>
-            <a:pPr algn="ctr">
-              <a:lnSpc>
-                <a:spcPct val="110000"/>
-              </a:lnSpc>
-            </a:pPr>
-            <a:r>
-              <a:rPr sz="1200" b="1">
-                <a:solidFill>
-                  <a:srgbClr val="FFFFFF"/>
-                </a:solidFill>
-                <a:latin typeface="맑은 고딕"/>
-                <a:ea typeface="맑은 고딕"/>
-                <a:cs typeface="맑은 고딕"/>
-              </a:rPr>
-              <a:t>3</a:t>
+            <a:pPr algn="l">
+              <a:lnSpc>
+                <a:spcPct val="110000"/>
+              </a:lnSpc>
+            </a:pPr>
+            <a:r>
+              <a:rPr sz="1400" b="0">
+                <a:solidFill>
+                  <a:srgbClr val="1F2A3A"/>
+                </a:solidFill>
+                <a:latin typeface="맑은 고딕"/>
+                <a:ea typeface="맑은 고딕"/>
+                <a:cs typeface="맑은 고딕"/>
+              </a:rPr>
+              <a:t>냉각 효율이 기준 70 %보다 낮다</a:t>
+            </a:r>
+          </a:p>
+          <a:p>
+            <a:pPr algn="l">
+              <a:lnSpc>
+                <a:spcPct val="110000"/>
+              </a:lnSpc>
+            </a:pPr>
+            <a:r>
+              <a:rPr sz="1400" b="0">
+                <a:solidFill>
+                  <a:srgbClr val="1F2A3A"/>
+                </a:solidFill>
+                <a:latin typeface="맑은 고딕"/>
+                <a:ea typeface="맑은 고딕"/>
+                <a:cs typeface="맑은 고딕"/>
+              </a:rPr>
+              <a:t>수치에 기준이 붙었다</a:t>
             </a:r>
           </a:p>
         </p:txBody>
@@ -35965,28 +35733,95 @@
         </p:nvSpPr>
         <p:spPr>
           <a:xfrm>
-            <a:off x="8018068" y="3677602"/>
-            <a:ext cx="3551834" cy="1679066"/>
-          </a:xfrm>
-          <a:prstGeom prst="rect">
-            <a:avLst/>
-          </a:prstGeom>
-          <a:noFill/>
-        </p:spPr>
-        <p:txBody>
-          <a:bodyPr wrap="square" anchor="t"/>
-          <a:lstStyle/>
-          <a:p>
-            <a:pPr algn="ctr">
-              <a:lnSpc>
-                <a:spcPct val="110000"/>
-              </a:lnSpc>
-              <a:spcAft>
-                <a:spcPts val="400"/>
-              </a:spcAft>
-            </a:pPr>
-            <a:r>
-              <a:rPr sz="1700" b="1">
+            <a:off x="9448495" y="3760012"/>
+            <a:ext cx="2103120" cy="865022"/>
+          </a:xfrm>
+          <a:prstGeom prst="rect">
+            <a:avLst/>
+          </a:prstGeom>
+          <a:noFill/>
+        </p:spPr>
+        <p:txBody>
+          <a:bodyPr wrap="square" anchor="ctr"/>
+          <a:lstStyle/>
+          <a:p>
+            <a:pPr algn="l">
+              <a:lnSpc>
+                <a:spcPct val="110000"/>
+              </a:lnSpc>
+            </a:pPr>
+            <a:r>
+              <a:rPr sz="1250" b="1">
+                <a:solidFill>
+                  <a:srgbClr val="556175"/>
+                </a:solidFill>
+                <a:latin typeface="맑은 고딕"/>
+                <a:ea typeface="맑은 고딕"/>
+                <a:cs typeface="맑은 고딕"/>
+              </a:rPr>
+              <a:t>벗어났는가</a:t>
+            </a:r>
+          </a:p>
+        </p:txBody>
+      </p:sp>
+      <p:sp>
+        <p:nvSpPr>
+          <p:cNvPr id="22" name="Rounded Rectangle 21"/>
+          <p:cNvSpPr/>
+          <p:nvPr/>
+        </p:nvSpPr>
+        <p:spPr>
+          <a:xfrm>
+            <a:off x="548640" y="4657039"/>
+            <a:ext cx="11094415" cy="801014"/>
+          </a:xfrm>
+          <a:prstGeom prst="roundRect">
+            <a:avLst>
+              <a:gd name="adj" fmla="val 8000"/>
+            </a:avLst>
+          </a:prstGeom>
+          <a:solidFill>
+            <a:srgbClr val="E7F3FD"/>
+          </a:solidFill>
+          <a:ln>
+            <a:noFill/>
+          </a:ln>
+        </p:spPr>
+        <p:txBody>
+          <a:bodyPr rtlCol="0" anchor="ctr"/>
+          <a:lstStyle/>
+          <a:p>
+            <a:pPr algn="ctr"/>
+          </a:p>
+        </p:txBody>
+      </p:sp>
+      <p:sp>
+        <p:nvSpPr>
+          <p:cNvPr id="23" name="TextBox 22"/>
+          <p:cNvSpPr txBox="1"/>
+          <p:nvPr/>
+        </p:nvSpPr>
+        <p:spPr>
+          <a:xfrm>
+            <a:off x="685800" y="4625035"/>
+            <a:ext cx="2514600" cy="865022"/>
+          </a:xfrm>
+          <a:prstGeom prst="rect">
+            <a:avLst/>
+          </a:prstGeom>
+          <a:noFill/>
+        </p:spPr>
+        <p:txBody>
+          <a:bodyPr wrap="square" anchor="ctr"/>
+          <a:lstStyle/>
+          <a:p>
+            <a:pPr algn="l">
+              <a:lnSpc>
+                <a:spcPct val="110000"/>
+              </a:lnSpc>
+            </a:pPr>
+            <a:r>
+              <a:rPr sz="1600" b="1">
                 <a:solidFill>
                   <a:srgbClr val="13294B"/>
                 </a:solidFill>
@@ -35997,17 +35832,35 @@
               <a:t>지식</a:t>
             </a:r>
           </a:p>
-          <a:p>
-            <a:pPr algn="ctr">
-              <a:lnSpc>
-                <a:spcPct val="110000"/>
-              </a:lnSpc>
-              <a:spcAft>
-                <a:spcPts val="400"/>
-              </a:spcAft>
-            </a:pPr>
-            <a:r>
-              <a:rPr sz="1350" b="0">
+        </p:txBody>
+      </p:sp>
+      <p:sp>
+        <p:nvSpPr>
+          <p:cNvPr id="24" name="TextBox 23"/>
+          <p:cNvSpPr txBox="1"/>
+          <p:nvPr/>
+        </p:nvSpPr>
+        <p:spPr>
+          <a:xfrm>
+            <a:off x="3200400" y="4625035"/>
+            <a:ext cx="6156655" cy="865022"/>
+          </a:xfrm>
+          <a:prstGeom prst="rect">
+            <a:avLst/>
+          </a:prstGeom>
+          <a:noFill/>
+        </p:spPr>
+        <p:txBody>
+          <a:bodyPr wrap="square" anchor="ctr"/>
+          <a:lstStyle/>
+          <a:p>
+            <a:pPr algn="l">
+              <a:lnSpc>
+                <a:spcPct val="110000"/>
+              </a:lnSpc>
+            </a:pPr>
+            <a:r>
+              <a:rPr sz="1400" b="0">
                 <a:solidFill>
                   <a:srgbClr val="1F2A3A"/>
                 </a:solidFill>
@@ -36015,20 +35868,17 @@
                 <a:ea typeface="맑은 고딕"/>
                 <a:cs typeface="맑은 고딕"/>
               </a:rPr>
-              <a:t>판단에 쓸 수 있게 이어진 것이다</a:t>
-            </a:r>
-          </a:p>
-          <a:p>
-            <a:pPr algn="ctr">
-              <a:lnSpc>
-                <a:spcPct val="110000"/>
-              </a:lnSpc>
-              <a:spcAft>
-                <a:spcPts val="400"/>
-              </a:spcAft>
-            </a:pPr>
-            <a:r>
-              <a:rPr sz="1350" b="0">
+              <a:t>냉각 효율이 낮고 팬 진동이 정상이면 쿨러 핀 오염이다</a:t>
+            </a:r>
+          </a:p>
+          <a:p>
+            <a:pPr algn="l">
+              <a:lnSpc>
+                <a:spcPct val="110000"/>
+              </a:lnSpc>
+            </a:pPr>
+            <a:r>
+              <a:rPr sz="1400" b="0">
                 <a:solidFill>
                   <a:srgbClr val="1F2A3A"/>
                 </a:solidFill>
@@ -36036,20 +35886,147 @@
                 <a:ea typeface="맑은 고딕"/>
                 <a:cs typeface="맑은 고딕"/>
               </a:rPr>
-              <a:t>유온 상승과 냉각 효율 저하는</a:t>
-            </a:r>
-          </a:p>
-          <a:p>
-            <a:pPr algn="ctr">
-              <a:lnSpc>
-                <a:spcPct val="110000"/>
-              </a:lnSpc>
-              <a:spcAft>
-                <a:spcPts val="400"/>
-              </a:spcAft>
-            </a:pPr>
-            <a:r>
-              <a:rPr sz="1350" b="0">
+              <a:t>정보가 원인으로 이어졌다</a:t>
+            </a:r>
+          </a:p>
+        </p:txBody>
+      </p:sp>
+      <p:sp>
+        <p:nvSpPr>
+          <p:cNvPr id="25" name="TextBox 24"/>
+          <p:cNvSpPr txBox="1"/>
+          <p:nvPr/>
+        </p:nvSpPr>
+        <p:spPr>
+          <a:xfrm>
+            <a:off x="9448495" y="4625035"/>
+            <a:ext cx="2103120" cy="865022"/>
+          </a:xfrm>
+          <a:prstGeom prst="rect">
+            <a:avLst/>
+          </a:prstGeom>
+          <a:noFill/>
+        </p:spPr>
+        <p:txBody>
+          <a:bodyPr wrap="square" anchor="ctr"/>
+          <a:lstStyle/>
+          <a:p>
+            <a:pPr algn="l">
+              <a:lnSpc>
+                <a:spcPct val="110000"/>
+              </a:lnSpc>
+            </a:pPr>
+            <a:r>
+              <a:rPr sz="1250" b="1">
+                <a:solidFill>
+                  <a:srgbClr val="1A6FC4"/>
+                </a:solidFill>
+                <a:latin typeface="맑은 고딕"/>
+                <a:ea typeface="맑은 고딕"/>
+                <a:cs typeface="맑은 고딕"/>
+              </a:rPr>
+              <a:t>왜 벗어났는가</a:t>
+            </a:r>
+          </a:p>
+        </p:txBody>
+      </p:sp>
+      <p:sp>
+        <p:nvSpPr>
+          <p:cNvPr id="26" name="Rounded Rectangle 25"/>
+          <p:cNvSpPr/>
+          <p:nvPr/>
+        </p:nvSpPr>
+        <p:spPr>
+          <a:xfrm>
+            <a:off x="548640" y="5522061"/>
+            <a:ext cx="11094415" cy="801014"/>
+          </a:xfrm>
+          <a:prstGeom prst="roundRect">
+            <a:avLst>
+              <a:gd name="adj" fmla="val 8000"/>
+            </a:avLst>
+          </a:prstGeom>
+          <a:solidFill>
+            <a:srgbClr val="E7F3FD"/>
+          </a:solidFill>
+          <a:ln>
+            <a:noFill/>
+          </a:ln>
+        </p:spPr>
+        <p:txBody>
+          <a:bodyPr rtlCol="0" anchor="ctr"/>
+          <a:lstStyle/>
+          <a:p>
+            <a:pPr algn="ctr"/>
+          </a:p>
+        </p:txBody>
+      </p:sp>
+      <p:sp>
+        <p:nvSpPr>
+          <p:cNvPr id="27" name="TextBox 26"/>
+          <p:cNvSpPr txBox="1"/>
+          <p:nvPr/>
+        </p:nvSpPr>
+        <p:spPr>
+          <a:xfrm>
+            <a:off x="685800" y="5490057"/>
+            <a:ext cx="2514600" cy="865022"/>
+          </a:xfrm>
+          <a:prstGeom prst="rect">
+            <a:avLst/>
+          </a:prstGeom>
+          <a:noFill/>
+        </p:spPr>
+        <p:txBody>
+          <a:bodyPr wrap="square" anchor="ctr"/>
+          <a:lstStyle/>
+          <a:p>
+            <a:pPr algn="l">
+              <a:lnSpc>
+                <a:spcPct val="110000"/>
+              </a:lnSpc>
+            </a:pPr>
+            <a:r>
+              <a:rPr sz="1600" b="1">
+                <a:solidFill>
+                  <a:srgbClr val="13294B"/>
+                </a:solidFill>
+                <a:latin typeface="맑은 고딕"/>
+                <a:ea typeface="맑은 고딕"/>
+                <a:cs typeface="맑은 고딕"/>
+              </a:rPr>
+              <a:t>지식</a:t>
+            </a:r>
+          </a:p>
+        </p:txBody>
+      </p:sp>
+      <p:sp>
+        <p:nvSpPr>
+          <p:cNvPr id="28" name="TextBox 27"/>
+          <p:cNvSpPr txBox="1"/>
+          <p:nvPr/>
+        </p:nvSpPr>
+        <p:spPr>
+          <a:xfrm>
+            <a:off x="3200400" y="5490057"/>
+            <a:ext cx="6156655" cy="865022"/>
+          </a:xfrm>
+          <a:prstGeom prst="rect">
+            <a:avLst/>
+          </a:prstGeom>
+          <a:noFill/>
+        </p:spPr>
+        <p:txBody>
+          <a:bodyPr wrap="square" anchor="ctr"/>
+          <a:lstStyle/>
+          <a:p>
+            <a:pPr algn="l">
+              <a:lnSpc>
+                <a:spcPct val="110000"/>
+              </a:lnSpc>
+            </a:pPr>
+            <a:r>
+              <a:rPr sz="1400" b="0">
                 <a:solidFill>
                   <a:srgbClr val="1F2A3A"/>
                 </a:solidFill>
@@ -36057,7 +36034,64 @@
                 <a:ea typeface="맑은 고딕"/>
                 <a:cs typeface="맑은 고딕"/>
               </a:rPr>
-              <a:t>쿨러의 냉각 성능 상실을 가리킨다</a:t>
+              <a:t>쿨러 핀 오염이면 핀을 세척한다</a:t>
+            </a:r>
+          </a:p>
+          <a:p>
+            <a:pPr algn="l">
+              <a:lnSpc>
+                <a:spcPct val="110000"/>
+              </a:lnSpc>
+            </a:pPr>
+            <a:r>
+              <a:rPr sz="1400" b="0">
+                <a:solidFill>
+                  <a:srgbClr val="1F2A3A"/>
+                </a:solidFill>
+                <a:latin typeface="맑은 고딕"/>
+                <a:ea typeface="맑은 고딕"/>
+                <a:cs typeface="맑은 고딕"/>
+              </a:rPr>
+              <a:t>원인이 조치로 이어졌다</a:t>
+            </a:r>
+          </a:p>
+        </p:txBody>
+      </p:sp>
+      <p:sp>
+        <p:nvSpPr>
+          <p:cNvPr id="29" name="TextBox 28"/>
+          <p:cNvSpPr txBox="1"/>
+          <p:nvPr/>
+        </p:nvSpPr>
+        <p:spPr>
+          <a:xfrm>
+            <a:off x="9448495" y="5490057"/>
+            <a:ext cx="2103120" cy="865022"/>
+          </a:xfrm>
+          <a:prstGeom prst="rect">
+            <a:avLst/>
+          </a:prstGeom>
+          <a:noFill/>
+        </p:spPr>
+        <p:txBody>
+          <a:bodyPr wrap="square" anchor="ctr"/>
+          <a:lstStyle/>
+          <a:p>
+            <a:pPr algn="l">
+              <a:lnSpc>
+                <a:spcPct val="110000"/>
+              </a:lnSpc>
+            </a:pPr>
+            <a:r>
+              <a:rPr sz="1250" b="1">
+                <a:solidFill>
+                  <a:srgbClr val="1A6FC4"/>
+                </a:solidFill>
+                <a:latin typeface="맑은 고딕"/>
+                <a:ea typeface="맑은 고딕"/>
+                <a:cs typeface="맑은 고딕"/>
+              </a:rPr>
+              <a:t>무엇을 할 것인가</a:t>
             </a:r>
           </a:p>
         </p:txBody>
